--- a/13.class_and_objects_4_and_6_mar/OOP_Python_PPTX_Part1.pptx
+++ b/13.class_and_objects_4_and_6_mar/OOP_Python_PPTX_Part1.pptx
@@ -305,7 +305,7 @@
             <a:pPr algn="r">
               <a:buNone/>
             </a:pPr>
-            <a:fld id="{3B679B77-FB21-4694-941C-3B424A7012A1}" type="slidenum">
+            <a:fld id="{5A3933B2-B4B7-4394-83C8-BD4C865A2B15}" type="slidenum">
               <a:rPr b="0" lang="en-IN" sz="1400" spc="-1" strike="noStrike">
                 <a:latin typeface="Times New Roman"/>
               </a:rPr>
@@ -353,7 +353,7 @@
         <p:spPr>
           <a:xfrm>
             <a:off x="685800" y="1143000"/>
-            <a:ext cx="5485320" cy="3085200"/>
+            <a:ext cx="5484960" cy="3084840"/>
           </a:xfrm>
           <a:prstGeom prst="rect">
             <a:avLst/>
@@ -376,7 +376,7 @@
         <p:spPr>
           <a:xfrm>
             <a:off x="685800" y="4400640"/>
-            <a:ext cx="5485320" cy="3599280"/>
+            <a:ext cx="5484960" cy="3598920"/>
           </a:xfrm>
           <a:prstGeom prst="rect">
             <a:avLst/>
@@ -410,7 +410,7 @@
         <p:spPr>
           <a:xfrm>
             <a:off x="3884760" y="8685360"/>
-            <a:ext cx="2970720" cy="457560"/>
+            <a:ext cx="2970360" cy="457200"/>
           </a:xfrm>
           <a:prstGeom prst="rect">
             <a:avLst/>
@@ -446,7 +446,7 @@
               </a:lnSpc>
               <a:buNone/>
             </a:pPr>
-            <a:fld id="{C001A295-F22B-4FF5-B7B8-9DE3C98111A3}" type="slidenum">
+            <a:fld id="{7BA2D86E-84B1-401B-8460-5D97CEF779B6}" type="slidenum">
               <a:rPr b="0" lang="en-US" sz="1200" spc="-1" strike="noStrike">
                 <a:solidFill>
                   <a:srgbClr val="000000"/>
@@ -497,7 +497,7 @@
         <p:spPr>
           <a:xfrm>
             <a:off x="685800" y="1143000"/>
-            <a:ext cx="5485320" cy="3085200"/>
+            <a:ext cx="5484960" cy="3084840"/>
           </a:xfrm>
           <a:prstGeom prst="rect">
             <a:avLst/>
@@ -520,7 +520,7 @@
         <p:spPr>
           <a:xfrm>
             <a:off x="685800" y="4400640"/>
-            <a:ext cx="5485320" cy="3599280"/>
+            <a:ext cx="5484960" cy="3598920"/>
           </a:xfrm>
           <a:prstGeom prst="rect">
             <a:avLst/>
@@ -554,7 +554,7 @@
         <p:spPr>
           <a:xfrm>
             <a:off x="3884760" y="8685360"/>
-            <a:ext cx="2970720" cy="457560"/>
+            <a:ext cx="2970360" cy="457200"/>
           </a:xfrm>
           <a:prstGeom prst="rect">
             <a:avLst/>
@@ -590,7 +590,7 @@
               </a:lnSpc>
               <a:buNone/>
             </a:pPr>
-            <a:fld id="{DE476102-4E89-4A76-9B61-B14F73168B4F}" type="slidenum">
+            <a:fld id="{5080904E-EE55-48D8-8178-5F11260E74E9}" type="slidenum">
               <a:rPr b="0" lang="en-US" sz="1200" spc="-1" strike="noStrike">
                 <a:solidFill>
                   <a:srgbClr val="000000"/>
@@ -641,7 +641,7 @@
         <p:spPr>
           <a:xfrm>
             <a:off x="685800" y="1143000"/>
-            <a:ext cx="5485320" cy="3085200"/>
+            <a:ext cx="5484960" cy="3084840"/>
           </a:xfrm>
           <a:prstGeom prst="rect">
             <a:avLst/>
@@ -664,7 +664,7 @@
         <p:spPr>
           <a:xfrm>
             <a:off x="685800" y="4400640"/>
-            <a:ext cx="5485320" cy="3599280"/>
+            <a:ext cx="5484960" cy="3598920"/>
           </a:xfrm>
           <a:prstGeom prst="rect">
             <a:avLst/>
@@ -698,7 +698,7 @@
         <p:spPr>
           <a:xfrm>
             <a:off x="3884760" y="8685360"/>
-            <a:ext cx="2970720" cy="457560"/>
+            <a:ext cx="2970360" cy="457200"/>
           </a:xfrm>
           <a:prstGeom prst="rect">
             <a:avLst/>
@@ -734,7 +734,7 @@
               </a:lnSpc>
               <a:buNone/>
             </a:pPr>
-            <a:fld id="{82127CA5-B5D2-4388-B12A-3D5790CDE100}" type="slidenum">
+            <a:fld id="{D0747EFC-FD9F-4410-BC6F-D19F81FA600B}" type="slidenum">
               <a:rPr b="0" lang="en-US" sz="1200" spc="-1" strike="noStrike">
                 <a:solidFill>
                   <a:srgbClr val="000000"/>
@@ -785,7 +785,7 @@
         <p:spPr>
           <a:xfrm>
             <a:off x="685800" y="1143000"/>
-            <a:ext cx="5485320" cy="3085200"/>
+            <a:ext cx="5484960" cy="3084840"/>
           </a:xfrm>
           <a:prstGeom prst="rect">
             <a:avLst/>
@@ -808,7 +808,7 @@
         <p:spPr>
           <a:xfrm>
             <a:off x="685800" y="4400640"/>
-            <a:ext cx="5485320" cy="3599280"/>
+            <a:ext cx="5484960" cy="3598920"/>
           </a:xfrm>
           <a:prstGeom prst="rect">
             <a:avLst/>
@@ -842,7 +842,7 @@
         <p:spPr>
           <a:xfrm>
             <a:off x="3884760" y="8685360"/>
-            <a:ext cx="2970720" cy="457560"/>
+            <a:ext cx="2970360" cy="457200"/>
           </a:xfrm>
           <a:prstGeom prst="rect">
             <a:avLst/>
@@ -878,7 +878,7 @@
               </a:lnSpc>
               <a:buNone/>
             </a:pPr>
-            <a:fld id="{B8EA4EC2-A175-41F3-8115-7E53EAA57746}" type="slidenum">
+            <a:fld id="{D0DF2F64-5C89-4F78-BE67-CB0CF5F6E342}" type="slidenum">
               <a:rPr b="0" lang="en-US" sz="1200" spc="-1" strike="noStrike">
                 <a:solidFill>
                   <a:srgbClr val="000000"/>
@@ -929,7 +929,7 @@
         <p:spPr>
           <a:xfrm>
             <a:off x="685800" y="1143000"/>
-            <a:ext cx="5485320" cy="3085200"/>
+            <a:ext cx="5484960" cy="3084840"/>
           </a:xfrm>
           <a:prstGeom prst="rect">
             <a:avLst/>
@@ -952,7 +952,7 @@
         <p:spPr>
           <a:xfrm>
             <a:off x="685800" y="4400640"/>
-            <a:ext cx="5485320" cy="3599280"/>
+            <a:ext cx="5484960" cy="3598920"/>
           </a:xfrm>
           <a:prstGeom prst="rect">
             <a:avLst/>
@@ -986,7 +986,7 @@
         <p:spPr>
           <a:xfrm>
             <a:off x="3884760" y="8685360"/>
-            <a:ext cx="2970720" cy="457560"/>
+            <a:ext cx="2970360" cy="457200"/>
           </a:xfrm>
           <a:prstGeom prst="rect">
             <a:avLst/>
@@ -1022,7 +1022,7 @@
               </a:lnSpc>
               <a:buNone/>
             </a:pPr>
-            <a:fld id="{E3647946-C9A6-48C7-A625-5F325A62E96C}" type="slidenum">
+            <a:fld id="{06C42717-A362-4E8F-BAF4-9FC451F44035}" type="slidenum">
               <a:rPr b="0" lang="en-US" sz="1200" spc="-1" strike="noStrike">
                 <a:solidFill>
                   <a:srgbClr val="000000"/>
@@ -1073,7 +1073,7 @@
         <p:spPr>
           <a:xfrm>
             <a:off x="685800" y="1143000"/>
-            <a:ext cx="5485320" cy="3085200"/>
+            <a:ext cx="5484960" cy="3084840"/>
           </a:xfrm>
           <a:prstGeom prst="rect">
             <a:avLst/>
@@ -1096,7 +1096,7 @@
         <p:spPr>
           <a:xfrm>
             <a:off x="685800" y="4400640"/>
-            <a:ext cx="5485320" cy="3599280"/>
+            <a:ext cx="5484960" cy="3598920"/>
           </a:xfrm>
           <a:prstGeom prst="rect">
             <a:avLst/>
@@ -1130,7 +1130,7 @@
         <p:spPr>
           <a:xfrm>
             <a:off x="3884760" y="8685360"/>
-            <a:ext cx="2970720" cy="457560"/>
+            <a:ext cx="2970360" cy="457200"/>
           </a:xfrm>
           <a:prstGeom prst="rect">
             <a:avLst/>
@@ -1166,7 +1166,7 @@
               </a:lnSpc>
               <a:buNone/>
             </a:pPr>
-            <a:fld id="{E64F80D2-447F-4E7C-8B7A-17ACEAF2FDEA}" type="slidenum">
+            <a:fld id="{681B3D85-AFA5-4996-B571-A1F43C69B6CE}" type="slidenum">
               <a:rPr b="0" lang="en-US" sz="1200" spc="-1" strike="noStrike">
                 <a:solidFill>
                   <a:srgbClr val="000000"/>
@@ -1217,7 +1217,7 @@
         <p:spPr>
           <a:xfrm>
             <a:off x="685800" y="1143000"/>
-            <a:ext cx="5485320" cy="3085200"/>
+            <a:ext cx="5484960" cy="3084840"/>
           </a:xfrm>
           <a:prstGeom prst="rect">
             <a:avLst/>
@@ -1240,7 +1240,7 @@
         <p:spPr>
           <a:xfrm>
             <a:off x="685800" y="4400640"/>
-            <a:ext cx="5485320" cy="3599280"/>
+            <a:ext cx="5484960" cy="3598920"/>
           </a:xfrm>
           <a:prstGeom prst="rect">
             <a:avLst/>
@@ -1274,7 +1274,7 @@
         <p:spPr>
           <a:xfrm>
             <a:off x="3884760" y="8685360"/>
-            <a:ext cx="2970720" cy="457560"/>
+            <a:ext cx="2970360" cy="457200"/>
           </a:xfrm>
           <a:prstGeom prst="rect">
             <a:avLst/>
@@ -1310,7 +1310,7 @@
               </a:lnSpc>
               <a:buNone/>
             </a:pPr>
-            <a:fld id="{6ADCF338-87D1-4F63-95DB-F15F640EF4C9}" type="slidenum">
+            <a:fld id="{0F40BF11-FE87-481C-A473-CCEB89B2B5AA}" type="slidenum">
               <a:rPr b="0" lang="en-US" sz="1200" spc="-1" strike="noStrike">
                 <a:solidFill>
                   <a:srgbClr val="000000"/>
@@ -1361,7 +1361,7 @@
         <p:spPr>
           <a:xfrm>
             <a:off x="685800" y="1143000"/>
-            <a:ext cx="5485320" cy="3085200"/>
+            <a:ext cx="5484960" cy="3084840"/>
           </a:xfrm>
           <a:prstGeom prst="rect">
             <a:avLst/>
@@ -1384,7 +1384,7 @@
         <p:spPr>
           <a:xfrm>
             <a:off x="685800" y="4400640"/>
-            <a:ext cx="5485320" cy="3599280"/>
+            <a:ext cx="5484960" cy="3598920"/>
           </a:xfrm>
           <a:prstGeom prst="rect">
             <a:avLst/>
@@ -1418,7 +1418,7 @@
         <p:spPr>
           <a:xfrm>
             <a:off x="3884760" y="8685360"/>
-            <a:ext cx="2970720" cy="457560"/>
+            <a:ext cx="2970360" cy="457200"/>
           </a:xfrm>
           <a:prstGeom prst="rect">
             <a:avLst/>
@@ -1454,7 +1454,7 @@
               </a:lnSpc>
               <a:buNone/>
             </a:pPr>
-            <a:fld id="{2E611CFA-2006-4542-B5D7-A46973BD5AAF}" type="slidenum">
+            <a:fld id="{1B639D46-756D-4631-8E4A-09A68E0F08C2}" type="slidenum">
               <a:rPr b="0" lang="en-US" sz="1200" spc="-1" strike="noStrike">
                 <a:solidFill>
                   <a:srgbClr val="000000"/>
@@ -1505,7 +1505,7 @@
         <p:spPr>
           <a:xfrm>
             <a:off x="685800" y="1143000"/>
-            <a:ext cx="5485320" cy="3085200"/>
+            <a:ext cx="5484960" cy="3084840"/>
           </a:xfrm>
           <a:prstGeom prst="rect">
             <a:avLst/>
@@ -1528,7 +1528,7 @@
         <p:spPr>
           <a:xfrm>
             <a:off x="685800" y="4400640"/>
-            <a:ext cx="5485320" cy="3599280"/>
+            <a:ext cx="5484960" cy="3598920"/>
           </a:xfrm>
           <a:prstGeom prst="rect">
             <a:avLst/>
@@ -1562,7 +1562,7 @@
         <p:spPr>
           <a:xfrm>
             <a:off x="3884760" y="8685360"/>
-            <a:ext cx="2970720" cy="457560"/>
+            <a:ext cx="2970360" cy="457200"/>
           </a:xfrm>
           <a:prstGeom prst="rect">
             <a:avLst/>
@@ -1598,7 +1598,7 @@
               </a:lnSpc>
               <a:buNone/>
             </a:pPr>
-            <a:fld id="{194450CE-78F8-49FA-8EB3-24B07E6B49BC}" type="slidenum">
+            <a:fld id="{E6C44B95-7DC0-4AC6-8205-D1893B1A8DA0}" type="slidenum">
               <a:rPr b="0" lang="en-US" sz="1200" spc="-1" strike="noStrike">
                 <a:solidFill>
                   <a:srgbClr val="000000"/>
@@ -1649,7 +1649,7 @@
         <p:spPr>
           <a:xfrm>
             <a:off x="685800" y="1143000"/>
-            <a:ext cx="5485320" cy="3085200"/>
+            <a:ext cx="5484960" cy="3084840"/>
           </a:xfrm>
           <a:prstGeom prst="rect">
             <a:avLst/>
@@ -1672,7 +1672,7 @@
         <p:spPr>
           <a:xfrm>
             <a:off x="685800" y="4400640"/>
-            <a:ext cx="5485320" cy="3599280"/>
+            <a:ext cx="5484960" cy="3598920"/>
           </a:xfrm>
           <a:prstGeom prst="rect">
             <a:avLst/>
@@ -1706,7 +1706,7 @@
         <p:spPr>
           <a:xfrm>
             <a:off x="3884760" y="8685360"/>
-            <a:ext cx="2970720" cy="457560"/>
+            <a:ext cx="2970360" cy="457200"/>
           </a:xfrm>
           <a:prstGeom prst="rect">
             <a:avLst/>
@@ -1742,7 +1742,7 @@
               </a:lnSpc>
               <a:buNone/>
             </a:pPr>
-            <a:fld id="{22FC6E8E-C919-497F-9E00-1BA67B2C78C5}" type="slidenum">
+            <a:fld id="{B0773CF9-683F-4157-B30C-F963EAD8AC7F}" type="slidenum">
               <a:rPr b="0" lang="en-US" sz="1200" spc="-1" strike="noStrike">
                 <a:solidFill>
                   <a:srgbClr val="000000"/>
@@ -1793,7 +1793,7 @@
         <p:spPr>
           <a:xfrm>
             <a:off x="685800" y="1143000"/>
-            <a:ext cx="5485320" cy="3085200"/>
+            <a:ext cx="5484960" cy="3084840"/>
           </a:xfrm>
           <a:prstGeom prst="rect">
             <a:avLst/>
@@ -1816,7 +1816,7 @@
         <p:spPr>
           <a:xfrm>
             <a:off x="685800" y="4400640"/>
-            <a:ext cx="5485320" cy="3599280"/>
+            <a:ext cx="5484960" cy="3598920"/>
           </a:xfrm>
           <a:prstGeom prst="rect">
             <a:avLst/>
@@ -1850,7 +1850,7 @@
         <p:spPr>
           <a:xfrm>
             <a:off x="3884760" y="8685360"/>
-            <a:ext cx="2970720" cy="457560"/>
+            <a:ext cx="2970360" cy="457200"/>
           </a:xfrm>
           <a:prstGeom prst="rect">
             <a:avLst/>
@@ -1886,7 +1886,7 @@
               </a:lnSpc>
               <a:buNone/>
             </a:pPr>
-            <a:fld id="{687A6D7C-68AB-4616-8807-2E27AC8F04B7}" type="slidenum">
+            <a:fld id="{F0DBFAA0-CCBD-4690-9DCE-7C344CBC576B}" type="slidenum">
               <a:rPr b="0" lang="en-US" sz="1200" spc="-1" strike="noStrike">
                 <a:solidFill>
                   <a:srgbClr val="000000"/>
@@ -1937,7 +1937,7 @@
         <p:spPr>
           <a:xfrm>
             <a:off x="685800" y="1143000"/>
-            <a:ext cx="5485320" cy="3085200"/>
+            <a:ext cx="5484960" cy="3084840"/>
           </a:xfrm>
           <a:prstGeom prst="rect">
             <a:avLst/>
@@ -1960,7 +1960,7 @@
         <p:spPr>
           <a:xfrm>
             <a:off x="685800" y="4400640"/>
-            <a:ext cx="5485320" cy="3599280"/>
+            <a:ext cx="5484960" cy="3598920"/>
           </a:xfrm>
           <a:prstGeom prst="rect">
             <a:avLst/>
@@ -1994,7 +1994,7 @@
         <p:spPr>
           <a:xfrm>
             <a:off x="3884760" y="8685360"/>
-            <a:ext cx="2970720" cy="457560"/>
+            <a:ext cx="2970360" cy="457200"/>
           </a:xfrm>
           <a:prstGeom prst="rect">
             <a:avLst/>
@@ -2030,7 +2030,7 @@
               </a:lnSpc>
               <a:buNone/>
             </a:pPr>
-            <a:fld id="{002BEDB6-3969-414D-B762-E7470E00D8D8}" type="slidenum">
+            <a:fld id="{8B31B26A-3430-4985-A39E-599620A71353}" type="slidenum">
               <a:rPr b="0" lang="en-US" sz="1200" spc="-1" strike="noStrike">
                 <a:solidFill>
                   <a:srgbClr val="000000"/>
@@ -2081,7 +2081,7 @@
         <p:spPr>
           <a:xfrm>
             <a:off x="685800" y="1143000"/>
-            <a:ext cx="5485320" cy="3085200"/>
+            <a:ext cx="5484960" cy="3084840"/>
           </a:xfrm>
           <a:prstGeom prst="rect">
             <a:avLst/>
@@ -2104,7 +2104,7 @@
         <p:spPr>
           <a:xfrm>
             <a:off x="685800" y="4400640"/>
-            <a:ext cx="5485320" cy="3599280"/>
+            <a:ext cx="5484960" cy="3598920"/>
           </a:xfrm>
           <a:prstGeom prst="rect">
             <a:avLst/>
@@ -2138,7 +2138,7 @@
         <p:spPr>
           <a:xfrm>
             <a:off x="3884760" y="8685360"/>
-            <a:ext cx="2970720" cy="457560"/>
+            <a:ext cx="2970360" cy="457200"/>
           </a:xfrm>
           <a:prstGeom prst="rect">
             <a:avLst/>
@@ -2174,7 +2174,7 @@
               </a:lnSpc>
               <a:buNone/>
             </a:pPr>
-            <a:fld id="{AEA3F951-AC62-4441-A501-3850CDDEB692}" type="slidenum">
+            <a:fld id="{4E026FD6-884B-472C-8244-4A769049AAD5}" type="slidenum">
               <a:rPr b="0" lang="en-US" sz="1200" spc="-1" strike="noStrike">
                 <a:solidFill>
                   <a:srgbClr val="000000"/>
@@ -2225,7 +2225,7 @@
         <p:spPr>
           <a:xfrm>
             <a:off x="685800" y="1143000"/>
-            <a:ext cx="5485320" cy="3085200"/>
+            <a:ext cx="5484960" cy="3084840"/>
           </a:xfrm>
           <a:prstGeom prst="rect">
             <a:avLst/>
@@ -2248,7 +2248,7 @@
         <p:spPr>
           <a:xfrm>
             <a:off x="685800" y="4400640"/>
-            <a:ext cx="5485320" cy="3599280"/>
+            <a:ext cx="5484960" cy="3598920"/>
           </a:xfrm>
           <a:prstGeom prst="rect">
             <a:avLst/>
@@ -2282,7 +2282,7 @@
         <p:spPr>
           <a:xfrm>
             <a:off x="3884760" y="8685360"/>
-            <a:ext cx="2970720" cy="457560"/>
+            <a:ext cx="2970360" cy="457200"/>
           </a:xfrm>
           <a:prstGeom prst="rect">
             <a:avLst/>
@@ -2318,7 +2318,7 @@
               </a:lnSpc>
               <a:buNone/>
             </a:pPr>
-            <a:fld id="{1959538C-4D96-48BC-8E63-FA25D5C373A5}" type="slidenum">
+            <a:fld id="{8F6C18BC-973E-413C-AE35-E4F8FAA66FB8}" type="slidenum">
               <a:rPr b="0" lang="en-US" sz="1200" spc="-1" strike="noStrike">
                 <a:solidFill>
                   <a:srgbClr val="000000"/>
@@ -4166,7 +4166,7 @@
         <p:spPr>
           <a:xfrm>
             <a:off x="0" y="0"/>
-            <a:ext cx="3473640" cy="5142600"/>
+            <a:ext cx="3473280" cy="5142240"/>
           </a:xfrm>
           <a:prstGeom prst="rect">
             <a:avLst/>
@@ -4197,7 +4197,7 @@
         <p:spPr>
           <a:xfrm>
             <a:off x="3474720" y="0"/>
-            <a:ext cx="53640" cy="5142600"/>
+            <a:ext cx="53280" cy="5142240"/>
           </a:xfrm>
           <a:prstGeom prst="rect">
             <a:avLst/>
@@ -4228,7 +4228,7 @@
         <p:spPr>
           <a:xfrm>
             <a:off x="457200" y="548640"/>
-            <a:ext cx="2376360" cy="2376360"/>
+            <a:ext cx="2376000" cy="2376000"/>
           </a:xfrm>
           <a:prstGeom prst="ellipse">
             <a:avLst/>
@@ -4259,7 +4259,7 @@
         <p:spPr>
           <a:xfrm>
             <a:off x="457200" y="548640"/>
-            <a:ext cx="2376360" cy="2376360"/>
+            <a:ext cx="2376000" cy="2376000"/>
           </a:xfrm>
           <a:prstGeom prst="rect">
             <a:avLst/>
@@ -4314,7 +4314,7 @@
         <p:spPr>
           <a:xfrm>
             <a:off x="274320" y="3108960"/>
-            <a:ext cx="2925000" cy="410400"/>
+            <a:ext cx="2924640" cy="410040"/>
           </a:xfrm>
           <a:prstGeom prst="rect">
             <a:avLst/>
@@ -4345,7 +4345,7 @@
               </a:tabLst>
             </a:pPr>
             <a:r>
-              <a:rPr b="1" lang="en-US" sz="1300" spc="392" strike="noStrike">
+              <a:rPr b="1" lang="en-US" sz="1300" spc="389" strike="noStrike">
                 <a:solidFill>
                   <a:srgbClr val="38bdf8"/>
                 </a:solidFill>
@@ -4369,7 +4369,7 @@
         <p:spPr>
           <a:xfrm>
             <a:off x="3749040" y="457200"/>
-            <a:ext cx="5211000" cy="1370520"/>
+            <a:ext cx="5210640" cy="1370160"/>
           </a:xfrm>
           <a:prstGeom prst="rect">
             <a:avLst/>
@@ -4448,7 +4448,7 @@
         <p:spPr>
           <a:xfrm>
             <a:off x="3749040" y="1874520"/>
-            <a:ext cx="5211000" cy="410400"/>
+            <a:ext cx="5210640" cy="410040"/>
           </a:xfrm>
           <a:prstGeom prst="rect">
             <a:avLst/>
@@ -4503,7 +4503,7 @@
         <p:spPr>
           <a:xfrm>
             <a:off x="3749040" y="2377440"/>
-            <a:ext cx="5211000" cy="35640"/>
+            <a:ext cx="5210640" cy="35280"/>
           </a:xfrm>
           <a:prstGeom prst="rect">
             <a:avLst/>
@@ -4534,7 +4534,7 @@
         <p:spPr>
           <a:xfrm>
             <a:off x="3749040" y="2560320"/>
-            <a:ext cx="5211000" cy="2193480"/>
+            <a:ext cx="5210640" cy="2193120"/>
           </a:xfrm>
           <a:prstGeom prst="rect">
             <a:avLst/>
@@ -4727,7 +4727,7 @@
         <p:spPr>
           <a:xfrm>
             <a:off x="0" y="0"/>
-            <a:ext cx="63000" cy="5142600"/>
+            <a:ext cx="62640" cy="5142240"/>
           </a:xfrm>
           <a:prstGeom prst="rect">
             <a:avLst/>
@@ -4758,7 +4758,7 @@
         <p:spPr>
           <a:xfrm>
             <a:off x="0" y="0"/>
-            <a:ext cx="9142920" cy="712080"/>
+            <a:ext cx="9142560" cy="711720"/>
           </a:xfrm>
           <a:prstGeom prst="rect">
             <a:avLst/>
@@ -4789,7 +4789,7 @@
         <p:spPr>
           <a:xfrm>
             <a:off x="182880" y="0"/>
-            <a:ext cx="7131240" cy="712080"/>
+            <a:ext cx="7130880" cy="711720"/>
           </a:xfrm>
           <a:prstGeom prst="rect">
             <a:avLst/>
@@ -4844,7 +4844,7 @@
         <p:spPr>
           <a:xfrm>
             <a:off x="7589520" y="109800"/>
-            <a:ext cx="1370520" cy="474480"/>
+            <a:ext cx="1370160" cy="474120"/>
           </a:xfrm>
           <a:prstGeom prst="rect">
             <a:avLst/>
@@ -4882,7 +4882,7 @@
         <p:spPr>
           <a:xfrm>
             <a:off x="7589520" y="109800"/>
-            <a:ext cx="1370520" cy="474480"/>
+            <a:ext cx="1370160" cy="474120"/>
           </a:xfrm>
           <a:prstGeom prst="rect">
             <a:avLst/>
@@ -4937,7 +4937,7 @@
         <p:spPr>
           <a:xfrm>
             <a:off x="182880" y="804600"/>
-            <a:ext cx="8777160" cy="410400"/>
+            <a:ext cx="8776800" cy="410040"/>
           </a:xfrm>
           <a:prstGeom prst="rect">
             <a:avLst/>
@@ -4992,7 +4992,7 @@
         <p:spPr>
           <a:xfrm>
             <a:off x="182880" y="1280160"/>
-            <a:ext cx="5302440" cy="3565080"/>
+            <a:ext cx="5302080" cy="3564720"/>
           </a:xfrm>
           <a:prstGeom prst="rect">
             <a:avLst/>
@@ -5030,7 +5030,7 @@
         <p:spPr>
           <a:xfrm>
             <a:off x="182880" y="1280160"/>
-            <a:ext cx="5302440" cy="254880"/>
+            <a:ext cx="5302080" cy="254520"/>
           </a:xfrm>
           <a:prstGeom prst="rect">
             <a:avLst/>
@@ -5061,7 +5061,7 @@
         <p:spPr>
           <a:xfrm>
             <a:off x="292680" y="1334880"/>
-            <a:ext cx="108720" cy="108720"/>
+            <a:ext cx="108360" cy="108360"/>
           </a:xfrm>
           <a:prstGeom prst="ellipse">
             <a:avLst/>
@@ -5092,7 +5092,7 @@
         <p:spPr>
           <a:xfrm>
             <a:off x="475560" y="1334880"/>
-            <a:ext cx="108720" cy="108720"/>
+            <a:ext cx="108360" cy="108360"/>
           </a:xfrm>
           <a:prstGeom prst="ellipse">
             <a:avLst/>
@@ -5123,7 +5123,7 @@
         <p:spPr>
           <a:xfrm>
             <a:off x="658440" y="1334880"/>
-            <a:ext cx="108720" cy="108720"/>
+            <a:ext cx="108360" cy="108360"/>
           </a:xfrm>
           <a:prstGeom prst="ellipse">
             <a:avLst/>
@@ -5154,7 +5154,7 @@
         <p:spPr>
           <a:xfrm>
             <a:off x="182880" y="1298520"/>
-            <a:ext cx="5256720" cy="200160"/>
+            <a:ext cx="5256360" cy="199800"/>
           </a:xfrm>
           <a:prstGeom prst="rect">
             <a:avLst/>
@@ -5209,7 +5209,7 @@
         <p:spPr>
           <a:xfrm>
             <a:off x="292680" y="1572840"/>
-            <a:ext cx="5119560" cy="3217680"/>
+            <a:ext cx="5119200" cy="3217320"/>
           </a:xfrm>
           <a:prstGeom prst="rect">
             <a:avLst/>
@@ -5939,7 +5939,7 @@
         <p:spPr>
           <a:xfrm>
             <a:off x="5669280" y="1280160"/>
-            <a:ext cx="3290760" cy="3565080"/>
+            <a:ext cx="3290400" cy="3564720"/>
           </a:xfrm>
           <a:prstGeom prst="rect">
             <a:avLst/>
@@ -5977,7 +5977,7 @@
         <p:spPr>
           <a:xfrm>
             <a:off x="5669280" y="1280160"/>
-            <a:ext cx="3290760" cy="53640"/>
+            <a:ext cx="3290400" cy="53280"/>
           </a:xfrm>
           <a:prstGeom prst="rect">
             <a:avLst/>
@@ -6008,7 +6008,7 @@
         <p:spPr>
           <a:xfrm>
             <a:off x="5806440" y="1371600"/>
-            <a:ext cx="3016440" cy="410400"/>
+            <a:ext cx="3016080" cy="410040"/>
           </a:xfrm>
           <a:prstGeom prst="rect">
             <a:avLst/>
@@ -6063,7 +6063,7 @@
         <p:spPr>
           <a:xfrm>
             <a:off x="5806440" y="1828800"/>
-            <a:ext cx="3016440" cy="1827720"/>
+            <a:ext cx="3016080" cy="1827360"/>
           </a:xfrm>
           <a:prstGeom prst="rect">
             <a:avLst/>
@@ -6094,7 +6094,7 @@
         <p:spPr>
           <a:xfrm>
             <a:off x="5916240" y="1883520"/>
-            <a:ext cx="2833560" cy="1717920"/>
+            <a:ext cx="2833200" cy="1717560"/>
           </a:xfrm>
           <a:prstGeom prst="rect">
             <a:avLst/>
@@ -6345,7 +6345,7 @@
         <p:spPr>
           <a:xfrm>
             <a:off x="5806440" y="3749040"/>
-            <a:ext cx="3016440" cy="959040"/>
+            <a:ext cx="3016080" cy="958680"/>
           </a:xfrm>
           <a:prstGeom prst="rect">
             <a:avLst/>
@@ -6437,7 +6437,7 @@
         <p:spPr>
           <a:xfrm>
             <a:off x="0" y="0"/>
-            <a:ext cx="63000" cy="5142600"/>
+            <a:ext cx="62640" cy="5142240"/>
           </a:xfrm>
           <a:prstGeom prst="rect">
             <a:avLst/>
@@ -6468,7 +6468,7 @@
         <p:spPr>
           <a:xfrm>
             <a:off x="0" y="0"/>
-            <a:ext cx="9142920" cy="712080"/>
+            <a:ext cx="9142560" cy="711720"/>
           </a:xfrm>
           <a:prstGeom prst="rect">
             <a:avLst/>
@@ -6499,7 +6499,7 @@
         <p:spPr>
           <a:xfrm>
             <a:off x="182880" y="0"/>
-            <a:ext cx="7131240" cy="712080"/>
+            <a:ext cx="7130880" cy="711720"/>
           </a:xfrm>
           <a:prstGeom prst="rect">
             <a:avLst/>
@@ -6554,7 +6554,7 @@
         <p:spPr>
           <a:xfrm>
             <a:off x="7589520" y="109800"/>
-            <a:ext cx="1370520" cy="474480"/>
+            <a:ext cx="1370160" cy="474120"/>
           </a:xfrm>
           <a:prstGeom prst="rect">
             <a:avLst/>
@@ -6592,7 +6592,7 @@
         <p:spPr>
           <a:xfrm>
             <a:off x="7589520" y="109800"/>
-            <a:ext cx="1370520" cy="474480"/>
+            <a:ext cx="1370160" cy="474120"/>
           </a:xfrm>
           <a:prstGeom prst="rect">
             <a:avLst/>
@@ -6647,7 +6647,7 @@
         <p:spPr>
           <a:xfrm>
             <a:off x="182880" y="804600"/>
-            <a:ext cx="4570920" cy="1919160"/>
+            <a:ext cx="4570560" cy="1918800"/>
           </a:xfrm>
           <a:prstGeom prst="rect">
             <a:avLst/>
@@ -6685,7 +6685,7 @@
         <p:spPr>
           <a:xfrm>
             <a:off x="320040" y="896040"/>
-            <a:ext cx="4296600" cy="318960"/>
+            <a:ext cx="4296240" cy="318600"/>
           </a:xfrm>
           <a:prstGeom prst="rect">
             <a:avLst/>
@@ -6740,7 +6740,7 @@
         <p:spPr>
           <a:xfrm>
             <a:off x="320040" y="1261800"/>
-            <a:ext cx="4296600" cy="1233360"/>
+            <a:ext cx="4296240" cy="1233000"/>
           </a:xfrm>
           <a:prstGeom prst="rect">
             <a:avLst/>
@@ -6771,7 +6771,7 @@
         <p:spPr>
           <a:xfrm>
             <a:off x="429840" y="1316880"/>
-            <a:ext cx="4113720" cy="1123560"/>
+            <a:ext cx="4113360" cy="1123200"/>
           </a:xfrm>
           <a:prstGeom prst="rect">
             <a:avLst/>
@@ -6966,7 +6966,7 @@
         <p:spPr>
           <a:xfrm>
             <a:off x="4937760" y="804600"/>
-            <a:ext cx="4022280" cy="1919160"/>
+            <a:ext cx="4021920" cy="1918800"/>
           </a:xfrm>
           <a:prstGeom prst="rect">
             <a:avLst/>
@@ -7004,7 +7004,7 @@
         <p:spPr>
           <a:xfrm>
             <a:off x="5074920" y="896040"/>
-            <a:ext cx="3747960" cy="318960"/>
+            <a:ext cx="3747600" cy="318600"/>
           </a:xfrm>
           <a:prstGeom prst="rect">
             <a:avLst/>
@@ -7059,7 +7059,7 @@
         <p:spPr>
           <a:xfrm>
             <a:off x="5074920" y="1261800"/>
-            <a:ext cx="3747960" cy="501840"/>
+            <a:ext cx="3747600" cy="501480"/>
           </a:xfrm>
           <a:prstGeom prst="rect">
             <a:avLst/>
@@ -7114,7 +7114,7 @@
         <p:spPr>
           <a:xfrm>
             <a:off x="5074920" y="1801440"/>
-            <a:ext cx="3747960" cy="501840"/>
+            <a:ext cx="3747600" cy="501480"/>
           </a:xfrm>
           <a:prstGeom prst="rect">
             <a:avLst/>
@@ -7145,7 +7145,7 @@
         <p:spPr>
           <a:xfrm>
             <a:off x="5184720" y="1856160"/>
-            <a:ext cx="3565080" cy="392040"/>
+            <a:ext cx="3564720" cy="391680"/>
           </a:xfrm>
           <a:prstGeom prst="rect">
             <a:avLst/>
@@ -7200,7 +7200,7 @@
         <p:spPr>
           <a:xfrm>
             <a:off x="182880" y="2816280"/>
-            <a:ext cx="4113720" cy="2010600"/>
+            <a:ext cx="4113360" cy="2010240"/>
           </a:xfrm>
           <a:prstGeom prst="rect">
             <a:avLst/>
@@ -7238,7 +7238,7 @@
         <p:spPr>
           <a:xfrm>
             <a:off x="182880" y="2816280"/>
-            <a:ext cx="4113720" cy="53640"/>
+            <a:ext cx="4113360" cy="53280"/>
           </a:xfrm>
           <a:prstGeom prst="rect">
             <a:avLst/>
@@ -7269,7 +7269,7 @@
         <p:spPr>
           <a:xfrm>
             <a:off x="320040" y="2907720"/>
-            <a:ext cx="3839400" cy="318960"/>
+            <a:ext cx="3839040" cy="318600"/>
           </a:xfrm>
           <a:prstGeom prst="rect">
             <a:avLst/>
@@ -7324,7 +7324,7 @@
         <p:spPr>
           <a:xfrm>
             <a:off x="320040" y="3264480"/>
-            <a:ext cx="3839400" cy="1187640"/>
+            <a:ext cx="3839040" cy="1187280"/>
           </a:xfrm>
           <a:prstGeom prst="rect">
             <a:avLst/>
@@ -7355,7 +7355,7 @@
         <p:spPr>
           <a:xfrm>
             <a:off x="429840" y="3319200"/>
-            <a:ext cx="3656520" cy="1077840"/>
+            <a:ext cx="3656160" cy="1077480"/>
           </a:xfrm>
           <a:prstGeom prst="rect">
             <a:avLst/>
@@ -7482,7 +7482,7 @@
         <p:spPr>
           <a:xfrm>
             <a:off x="4480560" y="2816280"/>
-            <a:ext cx="4479480" cy="2010600"/>
+            <a:ext cx="4479120" cy="2010240"/>
           </a:xfrm>
           <a:prstGeom prst="rect">
             <a:avLst/>
@@ -7520,7 +7520,7 @@
         <p:spPr>
           <a:xfrm>
             <a:off x="4480560" y="2816280"/>
-            <a:ext cx="4479480" cy="53640"/>
+            <a:ext cx="4479120" cy="53280"/>
           </a:xfrm>
           <a:prstGeom prst="rect">
             <a:avLst/>
@@ -7551,7 +7551,7 @@
         <p:spPr>
           <a:xfrm>
             <a:off x="4617720" y="2907720"/>
-            <a:ext cx="4205160" cy="318960"/>
+            <a:ext cx="4204800" cy="318600"/>
           </a:xfrm>
           <a:prstGeom prst="rect">
             <a:avLst/>
@@ -7606,7 +7606,7 @@
         <p:spPr>
           <a:xfrm>
             <a:off x="4617720" y="3264480"/>
-            <a:ext cx="4296600" cy="1480320"/>
+            <a:ext cx="4296240" cy="1479960"/>
           </a:xfrm>
           <a:prstGeom prst="rect">
             <a:avLst/>
@@ -7736,7 +7736,7 @@
         <p:spPr>
           <a:xfrm>
             <a:off x="0" y="0"/>
-            <a:ext cx="63000" cy="5142600"/>
+            <a:ext cx="62640" cy="5142240"/>
           </a:xfrm>
           <a:prstGeom prst="rect">
             <a:avLst/>
@@ -7767,7 +7767,7 @@
         <p:spPr>
           <a:xfrm>
             <a:off x="0" y="0"/>
-            <a:ext cx="9142920" cy="712080"/>
+            <a:ext cx="9142560" cy="711720"/>
           </a:xfrm>
           <a:prstGeom prst="rect">
             <a:avLst/>
@@ -7798,7 +7798,7 @@
         <p:spPr>
           <a:xfrm>
             <a:off x="182880" y="0"/>
-            <a:ext cx="7131240" cy="712080"/>
+            <a:ext cx="7130880" cy="711720"/>
           </a:xfrm>
           <a:prstGeom prst="rect">
             <a:avLst/>
@@ -7853,7 +7853,7 @@
         <p:spPr>
           <a:xfrm>
             <a:off x="7589520" y="109800"/>
-            <a:ext cx="1370520" cy="474480"/>
+            <a:ext cx="1370160" cy="474120"/>
           </a:xfrm>
           <a:prstGeom prst="rect">
             <a:avLst/>
@@ -7891,7 +7891,7 @@
         <p:spPr>
           <a:xfrm>
             <a:off x="7589520" y="109800"/>
-            <a:ext cx="1370520" cy="474480"/>
+            <a:ext cx="1370160" cy="474120"/>
           </a:xfrm>
           <a:prstGeom prst="rect">
             <a:avLst/>
@@ -7946,7 +7946,7 @@
         <p:spPr>
           <a:xfrm>
             <a:off x="182880" y="804600"/>
-            <a:ext cx="5211000" cy="4068000"/>
+            <a:ext cx="5210640" cy="4067640"/>
           </a:xfrm>
           <a:prstGeom prst="rect">
             <a:avLst/>
@@ -7984,7 +7984,7 @@
         <p:spPr>
           <a:xfrm>
             <a:off x="182880" y="804600"/>
-            <a:ext cx="5211000" cy="254880"/>
+            <a:ext cx="5210640" cy="254520"/>
           </a:xfrm>
           <a:prstGeom prst="rect">
             <a:avLst/>
@@ -8015,7 +8015,7 @@
         <p:spPr>
           <a:xfrm>
             <a:off x="292680" y="859680"/>
-            <a:ext cx="108720" cy="108720"/>
+            <a:ext cx="108360" cy="108360"/>
           </a:xfrm>
           <a:prstGeom prst="ellipse">
             <a:avLst/>
@@ -8046,7 +8046,7 @@
         <p:spPr>
           <a:xfrm>
             <a:off x="475560" y="859680"/>
-            <a:ext cx="108720" cy="108720"/>
+            <a:ext cx="108360" cy="108360"/>
           </a:xfrm>
           <a:prstGeom prst="ellipse">
             <a:avLst/>
@@ -8077,7 +8077,7 @@
         <p:spPr>
           <a:xfrm>
             <a:off x="658440" y="859680"/>
-            <a:ext cx="108720" cy="108720"/>
+            <a:ext cx="108360" cy="108360"/>
           </a:xfrm>
           <a:prstGeom prst="ellipse">
             <a:avLst/>
@@ -8108,7 +8108,7 @@
         <p:spPr>
           <a:xfrm>
             <a:off x="182880" y="822960"/>
-            <a:ext cx="5165280" cy="200160"/>
+            <a:ext cx="5164920" cy="199800"/>
           </a:xfrm>
           <a:prstGeom prst="rect">
             <a:avLst/>
@@ -8163,7 +8163,7 @@
         <p:spPr>
           <a:xfrm>
             <a:off x="292680" y="1097280"/>
-            <a:ext cx="5028120" cy="3720600"/>
+            <a:ext cx="5027760" cy="3720240"/>
           </a:xfrm>
           <a:prstGeom prst="rect">
             <a:avLst/>
@@ -9009,7 +9009,7 @@
         <p:spPr>
           <a:xfrm>
             <a:off x="5577840" y="804600"/>
-            <a:ext cx="3382200" cy="1827720"/>
+            <a:ext cx="3381840" cy="1827360"/>
           </a:xfrm>
           <a:prstGeom prst="rect">
             <a:avLst/>
@@ -9047,7 +9047,7 @@
         <p:spPr>
           <a:xfrm>
             <a:off x="5715000" y="896040"/>
-            <a:ext cx="3107880" cy="291600"/>
+            <a:ext cx="3107520" cy="291240"/>
           </a:xfrm>
           <a:prstGeom prst="rect">
             <a:avLst/>
@@ -9078,7 +9078,7 @@
               </a:tabLst>
             </a:pPr>
             <a:r>
-              <a:rPr b="1" lang="en-US" sz="1100" spc="194" strike="noStrike">
+              <a:rPr b="1" lang="en-US" sz="1100" spc="191" strike="noStrike">
                 <a:solidFill>
                   <a:srgbClr val="34d399"/>
                 </a:solidFill>
@@ -9102,7 +9102,7 @@
         <p:spPr>
           <a:xfrm>
             <a:off x="5715000" y="1207080"/>
-            <a:ext cx="3107880" cy="1141920"/>
+            <a:ext cx="3107520" cy="1141560"/>
           </a:xfrm>
           <a:prstGeom prst="rect">
             <a:avLst/>
@@ -9157,7 +9157,7 @@
         <p:spPr>
           <a:xfrm>
             <a:off x="5577840" y="2743200"/>
-            <a:ext cx="3382200" cy="1919160"/>
+            <a:ext cx="3381840" cy="1918800"/>
           </a:xfrm>
           <a:prstGeom prst="rect">
             <a:avLst/>
@@ -9195,7 +9195,7 @@
         <p:spPr>
           <a:xfrm>
             <a:off x="5715000" y="2834640"/>
-            <a:ext cx="3107880" cy="291600"/>
+            <a:ext cx="3107520" cy="291240"/>
           </a:xfrm>
           <a:prstGeom prst="rect">
             <a:avLst/>
@@ -9226,7 +9226,7 @@
               </a:tabLst>
             </a:pPr>
             <a:r>
-              <a:rPr b="1" lang="en-US" sz="1100" spc="194" strike="noStrike">
+              <a:rPr b="1" lang="en-US" sz="1100" spc="191" strike="noStrike">
                 <a:solidFill>
                   <a:srgbClr val="f59e0b"/>
                 </a:solidFill>
@@ -9250,7 +9250,7 @@
         <p:spPr>
           <a:xfrm>
             <a:off x="5715000" y="3154680"/>
-            <a:ext cx="3107880" cy="1279080"/>
+            <a:ext cx="3107520" cy="1278720"/>
           </a:xfrm>
           <a:prstGeom prst="rect">
             <a:avLst/>
@@ -9342,7 +9342,7 @@
         <p:spPr>
           <a:xfrm>
             <a:off x="0" y="0"/>
-            <a:ext cx="63000" cy="5142600"/>
+            <a:ext cx="62640" cy="5142240"/>
           </a:xfrm>
           <a:prstGeom prst="rect">
             <a:avLst/>
@@ -9373,7 +9373,7 @@
         <p:spPr>
           <a:xfrm>
             <a:off x="0" y="0"/>
-            <a:ext cx="9142920" cy="712080"/>
+            <a:ext cx="9142560" cy="711720"/>
           </a:xfrm>
           <a:prstGeom prst="rect">
             <a:avLst/>
@@ -9404,7 +9404,7 @@
         <p:spPr>
           <a:xfrm>
             <a:off x="182880" y="0"/>
-            <a:ext cx="7131240" cy="712080"/>
+            <a:ext cx="7130880" cy="711720"/>
           </a:xfrm>
           <a:prstGeom prst="rect">
             <a:avLst/>
@@ -9459,7 +9459,7 @@
         <p:spPr>
           <a:xfrm>
             <a:off x="7589520" y="109800"/>
-            <a:ext cx="1370520" cy="474480"/>
+            <a:ext cx="1370160" cy="474120"/>
           </a:xfrm>
           <a:prstGeom prst="rect">
             <a:avLst/>
@@ -9497,7 +9497,7 @@
         <p:spPr>
           <a:xfrm>
             <a:off x="7589520" y="109800"/>
-            <a:ext cx="1370520" cy="474480"/>
+            <a:ext cx="1370160" cy="474120"/>
           </a:xfrm>
           <a:prstGeom prst="rect">
             <a:avLst/>
@@ -9552,7 +9552,7 @@
         <p:spPr>
           <a:xfrm>
             <a:off x="182880" y="804600"/>
-            <a:ext cx="8777160" cy="1324800"/>
+            <a:ext cx="8776800" cy="1324440"/>
           </a:xfrm>
           <a:prstGeom prst="rect">
             <a:avLst/>
@@ -9590,7 +9590,7 @@
         <p:spPr>
           <a:xfrm>
             <a:off x="320040" y="896040"/>
-            <a:ext cx="8411400" cy="273240"/>
+            <a:ext cx="8411040" cy="272880"/>
           </a:xfrm>
           <a:prstGeom prst="rect">
             <a:avLst/>
@@ -9621,7 +9621,7 @@
               </a:tabLst>
             </a:pPr>
             <a:r>
-              <a:rPr b="1" lang="en-US" sz="1100" spc="293" strike="noStrike">
+              <a:rPr b="1" lang="en-US" sz="1100" spc="290" strike="noStrike">
                 <a:solidFill>
                   <a:srgbClr val="38bdf8"/>
                 </a:solidFill>
@@ -9645,7 +9645,7 @@
         <p:spPr>
           <a:xfrm>
             <a:off x="365760" y="1207080"/>
-            <a:ext cx="1416240" cy="684720"/>
+            <a:ext cx="1415880" cy="684360"/>
           </a:xfrm>
           <a:prstGeom prst="rect">
             <a:avLst/>
@@ -9676,7 +9676,7 @@
         <p:spPr>
           <a:xfrm>
             <a:off x="411480" y="1207080"/>
-            <a:ext cx="1324800" cy="684720"/>
+            <a:ext cx="1324440" cy="684360"/>
           </a:xfrm>
           <a:prstGeom prst="rect">
             <a:avLst/>
@@ -9755,7 +9755,7 @@
         <p:spPr>
           <a:xfrm>
             <a:off x="1828800" y="1261800"/>
-            <a:ext cx="181800" cy="684720"/>
+            <a:ext cx="181440" cy="684360"/>
           </a:xfrm>
           <a:prstGeom prst="rect">
             <a:avLst/>
@@ -9810,7 +9810,7 @@
         <p:spPr>
           <a:xfrm>
             <a:off x="1965960" y="1207080"/>
-            <a:ext cx="2056320" cy="684720"/>
+            <a:ext cx="2055960" cy="684360"/>
           </a:xfrm>
           <a:prstGeom prst="rect">
             <a:avLst/>
@@ -9841,7 +9841,7 @@
         <p:spPr>
           <a:xfrm>
             <a:off x="2011680" y="1207080"/>
-            <a:ext cx="1964880" cy="684720"/>
+            <a:ext cx="1964520" cy="684360"/>
           </a:xfrm>
           <a:prstGeom prst="rect">
             <a:avLst/>
@@ -9920,7 +9920,7 @@
         <p:spPr>
           <a:xfrm>
             <a:off x="4069080" y="1261800"/>
-            <a:ext cx="181800" cy="684720"/>
+            <a:ext cx="181440" cy="684360"/>
           </a:xfrm>
           <a:prstGeom prst="rect">
             <a:avLst/>
@@ -9975,7 +9975,7 @@
         <p:spPr>
           <a:xfrm>
             <a:off x="4206240" y="1207080"/>
-            <a:ext cx="2056320" cy="684720"/>
+            <a:ext cx="2055960" cy="684360"/>
           </a:xfrm>
           <a:prstGeom prst="rect">
             <a:avLst/>
@@ -10006,7 +10006,7 @@
         <p:spPr>
           <a:xfrm>
             <a:off x="4251960" y="1207080"/>
-            <a:ext cx="1964880" cy="684720"/>
+            <a:ext cx="1964520" cy="684360"/>
           </a:xfrm>
           <a:prstGeom prst="rect">
             <a:avLst/>
@@ -10085,7 +10085,7 @@
         <p:spPr>
           <a:xfrm>
             <a:off x="6309360" y="1261800"/>
-            <a:ext cx="181800" cy="684720"/>
+            <a:ext cx="181440" cy="684360"/>
           </a:xfrm>
           <a:prstGeom prst="rect">
             <a:avLst/>
@@ -10140,7 +10140,7 @@
         <p:spPr>
           <a:xfrm>
             <a:off x="6446520" y="1207080"/>
-            <a:ext cx="2467800" cy="684720"/>
+            <a:ext cx="2467440" cy="684360"/>
           </a:xfrm>
           <a:prstGeom prst="rect">
             <a:avLst/>
@@ -10171,7 +10171,7 @@
         <p:spPr>
           <a:xfrm>
             <a:off x="6492240" y="1207080"/>
-            <a:ext cx="2376360" cy="684720"/>
+            <a:ext cx="2376000" cy="684360"/>
           </a:xfrm>
           <a:prstGeom prst="rect">
             <a:avLst/>
@@ -10250,7 +10250,7 @@
         <p:spPr>
           <a:xfrm>
             <a:off x="182880" y="2249280"/>
-            <a:ext cx="8777160" cy="1233360"/>
+            <a:ext cx="8776800" cy="1233000"/>
           </a:xfrm>
           <a:prstGeom prst="rect">
             <a:avLst/>
@@ -10288,7 +10288,7 @@
         <p:spPr>
           <a:xfrm>
             <a:off x="182880" y="2249280"/>
-            <a:ext cx="53640" cy="1233360"/>
+            <a:ext cx="53280" cy="1233000"/>
           </a:xfrm>
           <a:prstGeom prst="rect">
             <a:avLst/>
@@ -10319,7 +10319,7 @@
         <p:spPr>
           <a:xfrm>
             <a:off x="365760" y="2340720"/>
-            <a:ext cx="1370520" cy="254880"/>
+            <a:ext cx="1370160" cy="254520"/>
           </a:xfrm>
           <a:prstGeom prst="rect">
             <a:avLst/>
@@ -10350,7 +10350,7 @@
               </a:tabLst>
             </a:pPr>
             <a:r>
-              <a:rPr b="1" lang="en-US" sz="1000" spc="194" strike="noStrike">
+              <a:rPr b="1" lang="en-US" sz="1000" spc="191" strike="noStrike">
                 <a:solidFill>
                   <a:srgbClr val="38bdf8"/>
                 </a:solidFill>
@@ -10374,7 +10374,7 @@
         <p:spPr>
           <a:xfrm>
             <a:off x="365760" y="2633400"/>
-            <a:ext cx="8411400" cy="684720"/>
+            <a:ext cx="8411040" cy="684360"/>
           </a:xfrm>
           <a:prstGeom prst="rect">
             <a:avLst/>
@@ -10429,7 +10429,7 @@
         <p:spPr>
           <a:xfrm>
             <a:off x="182880" y="3584520"/>
-            <a:ext cx="2102040" cy="1324800"/>
+            <a:ext cx="2101680" cy="1324440"/>
           </a:xfrm>
           <a:prstGeom prst="rect">
             <a:avLst/>
@@ -10467,7 +10467,7 @@
         <p:spPr>
           <a:xfrm>
             <a:off x="274320" y="3675960"/>
-            <a:ext cx="383040" cy="383040"/>
+            <a:ext cx="382680" cy="382680"/>
           </a:xfrm>
           <a:prstGeom prst="ellipse">
             <a:avLst/>
@@ -10498,7 +10498,7 @@
         <p:spPr>
           <a:xfrm>
             <a:off x="274320" y="3675960"/>
-            <a:ext cx="383040" cy="383040"/>
+            <a:ext cx="382680" cy="382680"/>
           </a:xfrm>
           <a:prstGeom prst="rect">
             <a:avLst/>
@@ -10553,7 +10553,7 @@
         <p:spPr>
           <a:xfrm>
             <a:off x="749880" y="3675960"/>
-            <a:ext cx="1416240" cy="383040"/>
+            <a:ext cx="1415880" cy="382680"/>
           </a:xfrm>
           <a:prstGeom prst="rect">
             <a:avLst/>
@@ -10608,7 +10608,7 @@
         <p:spPr>
           <a:xfrm>
             <a:off x="274320" y="4133160"/>
-            <a:ext cx="1919160" cy="657360"/>
+            <a:ext cx="1918800" cy="657000"/>
           </a:xfrm>
           <a:prstGeom prst="rect">
             <a:avLst/>
@@ -10663,7 +10663,7 @@
         <p:spPr>
           <a:xfrm>
             <a:off x="2377440" y="3584520"/>
-            <a:ext cx="2102040" cy="1324800"/>
+            <a:ext cx="2101680" cy="1324440"/>
           </a:xfrm>
           <a:prstGeom prst="rect">
             <a:avLst/>
@@ -10701,7 +10701,7 @@
         <p:spPr>
           <a:xfrm>
             <a:off x="2468880" y="3675960"/>
-            <a:ext cx="383040" cy="383040"/>
+            <a:ext cx="382680" cy="382680"/>
           </a:xfrm>
           <a:prstGeom prst="ellipse">
             <a:avLst/>
@@ -10732,7 +10732,7 @@
         <p:spPr>
           <a:xfrm>
             <a:off x="2468880" y="3675960"/>
-            <a:ext cx="383040" cy="383040"/>
+            <a:ext cx="382680" cy="382680"/>
           </a:xfrm>
           <a:prstGeom prst="rect">
             <a:avLst/>
@@ -10787,7 +10787,7 @@
         <p:spPr>
           <a:xfrm>
             <a:off x="2944440" y="3675960"/>
-            <a:ext cx="1416240" cy="383040"/>
+            <a:ext cx="1415880" cy="382680"/>
           </a:xfrm>
           <a:prstGeom prst="rect">
             <a:avLst/>
@@ -10842,7 +10842,7 @@
         <p:spPr>
           <a:xfrm>
             <a:off x="2468880" y="4133160"/>
-            <a:ext cx="1919160" cy="657360"/>
+            <a:ext cx="1918800" cy="657000"/>
           </a:xfrm>
           <a:prstGeom prst="rect">
             <a:avLst/>
@@ -10897,7 +10897,7 @@
         <p:spPr>
           <a:xfrm>
             <a:off x="4572000" y="3584520"/>
-            <a:ext cx="2102040" cy="1324800"/>
+            <a:ext cx="2101680" cy="1324440"/>
           </a:xfrm>
           <a:prstGeom prst="rect">
             <a:avLst/>
@@ -10935,7 +10935,7 @@
         <p:spPr>
           <a:xfrm>
             <a:off x="4663440" y="3675960"/>
-            <a:ext cx="383040" cy="383040"/>
+            <a:ext cx="382680" cy="382680"/>
           </a:xfrm>
           <a:prstGeom prst="ellipse">
             <a:avLst/>
@@ -10966,7 +10966,7 @@
         <p:spPr>
           <a:xfrm>
             <a:off x="4663440" y="3675960"/>
-            <a:ext cx="383040" cy="383040"/>
+            <a:ext cx="382680" cy="382680"/>
           </a:xfrm>
           <a:prstGeom prst="rect">
             <a:avLst/>
@@ -11021,7 +11021,7 @@
         <p:spPr>
           <a:xfrm>
             <a:off x="5139000" y="3675960"/>
-            <a:ext cx="1416240" cy="383040"/>
+            <a:ext cx="1415880" cy="382680"/>
           </a:xfrm>
           <a:prstGeom prst="rect">
             <a:avLst/>
@@ -11076,7 +11076,7 @@
         <p:spPr>
           <a:xfrm>
             <a:off x="4663440" y="4133160"/>
-            <a:ext cx="1919160" cy="657360"/>
+            <a:ext cx="1918800" cy="657000"/>
           </a:xfrm>
           <a:prstGeom prst="rect">
             <a:avLst/>
@@ -11131,7 +11131,7 @@
         <p:spPr>
           <a:xfrm>
             <a:off x="6766560" y="3584520"/>
-            <a:ext cx="2102040" cy="1324800"/>
+            <a:ext cx="2101680" cy="1324440"/>
           </a:xfrm>
           <a:prstGeom prst="rect">
             <a:avLst/>
@@ -11169,7 +11169,7 @@
         <p:spPr>
           <a:xfrm>
             <a:off x="6858000" y="3675960"/>
-            <a:ext cx="383040" cy="383040"/>
+            <a:ext cx="382680" cy="382680"/>
           </a:xfrm>
           <a:prstGeom prst="ellipse">
             <a:avLst/>
@@ -11200,7 +11200,7 @@
         <p:spPr>
           <a:xfrm>
             <a:off x="6858000" y="3675960"/>
-            <a:ext cx="383040" cy="383040"/>
+            <a:ext cx="382680" cy="382680"/>
           </a:xfrm>
           <a:prstGeom prst="rect">
             <a:avLst/>
@@ -11255,7 +11255,7 @@
         <p:spPr>
           <a:xfrm>
             <a:off x="7333560" y="3675960"/>
-            <a:ext cx="1416240" cy="383040"/>
+            <a:ext cx="1415880" cy="382680"/>
           </a:xfrm>
           <a:prstGeom prst="rect">
             <a:avLst/>
@@ -11310,7 +11310,7 @@
         <p:spPr>
           <a:xfrm>
             <a:off x="6858000" y="4133160"/>
-            <a:ext cx="1919160" cy="657360"/>
+            <a:ext cx="1918800" cy="657000"/>
           </a:xfrm>
           <a:prstGeom prst="rect">
             <a:avLst/>
@@ -11402,7 +11402,7 @@
         <p:spPr>
           <a:xfrm>
             <a:off x="0" y="0"/>
-            <a:ext cx="63000" cy="5142600"/>
+            <a:ext cx="62640" cy="5142240"/>
           </a:xfrm>
           <a:prstGeom prst="rect">
             <a:avLst/>
@@ -11433,7 +11433,7 @@
         <p:spPr>
           <a:xfrm>
             <a:off x="0" y="0"/>
-            <a:ext cx="9142920" cy="712080"/>
+            <a:ext cx="9142560" cy="711720"/>
           </a:xfrm>
           <a:prstGeom prst="rect">
             <a:avLst/>
@@ -11464,7 +11464,7 @@
         <p:spPr>
           <a:xfrm>
             <a:off x="182880" y="0"/>
-            <a:ext cx="7131240" cy="712080"/>
+            <a:ext cx="7130880" cy="711720"/>
           </a:xfrm>
           <a:prstGeom prst="rect">
             <a:avLst/>
@@ -11519,7 +11519,7 @@
         <p:spPr>
           <a:xfrm>
             <a:off x="7589520" y="109800"/>
-            <a:ext cx="1370520" cy="474480"/>
+            <a:ext cx="1370160" cy="474120"/>
           </a:xfrm>
           <a:prstGeom prst="rect">
             <a:avLst/>
@@ -11557,7 +11557,7 @@
         <p:spPr>
           <a:xfrm>
             <a:off x="7589520" y="109800"/>
-            <a:ext cx="1370520" cy="474480"/>
+            <a:ext cx="1370160" cy="474120"/>
           </a:xfrm>
           <a:prstGeom prst="rect">
             <a:avLst/>
@@ -11612,7 +11612,7 @@
         <p:spPr>
           <a:xfrm>
             <a:off x="182880" y="822960"/>
-            <a:ext cx="2833560" cy="53640"/>
+            <a:ext cx="2833200" cy="53280"/>
           </a:xfrm>
           <a:prstGeom prst="rect">
             <a:avLst/>
@@ -11643,7 +11643,7 @@
         <p:spPr>
           <a:xfrm>
             <a:off x="292680" y="951120"/>
-            <a:ext cx="410400" cy="410400"/>
+            <a:ext cx="410040" cy="410040"/>
           </a:xfrm>
           <a:prstGeom prst="rect">
             <a:avLst/>
@@ -11698,7 +11698,7 @@
         <p:spPr>
           <a:xfrm>
             <a:off x="320040" y="1463040"/>
-            <a:ext cx="2604960" cy="1141920"/>
+            <a:ext cx="2604600" cy="1141560"/>
           </a:xfrm>
           <a:prstGeom prst="rect">
             <a:avLst/>
@@ -11753,7 +11753,7 @@
         <p:spPr>
           <a:xfrm>
             <a:off x="3154680" y="822960"/>
-            <a:ext cx="2833560" cy="1919160"/>
+            <a:ext cx="2833200" cy="1918800"/>
           </a:xfrm>
           <a:prstGeom prst="rect">
             <a:avLst/>
@@ -11791,7 +11791,7 @@
         <p:spPr>
           <a:xfrm>
             <a:off x="3154680" y="822960"/>
-            <a:ext cx="2833560" cy="53640"/>
+            <a:ext cx="2833200" cy="53280"/>
           </a:xfrm>
           <a:prstGeom prst="rect">
             <a:avLst/>
@@ -11822,7 +11822,7 @@
         <p:spPr>
           <a:xfrm>
             <a:off x="3264480" y="951120"/>
-            <a:ext cx="410400" cy="410400"/>
+            <a:ext cx="410040" cy="410040"/>
           </a:xfrm>
           <a:prstGeom prst="ellipse">
             <a:avLst/>
@@ -11853,7 +11853,7 @@
         <p:spPr>
           <a:xfrm>
             <a:off x="3264480" y="951120"/>
-            <a:ext cx="410400" cy="410400"/>
+            <a:ext cx="410040" cy="410040"/>
           </a:xfrm>
           <a:prstGeom prst="rect">
             <a:avLst/>
@@ -11908,7 +11908,7 @@
         <p:spPr>
           <a:xfrm>
             <a:off x="3749040" y="987480"/>
-            <a:ext cx="2147760" cy="364680"/>
+            <a:ext cx="2147400" cy="364320"/>
           </a:xfrm>
           <a:prstGeom prst="rect">
             <a:avLst/>
@@ -11963,7 +11963,7 @@
         <p:spPr>
           <a:xfrm>
             <a:off x="3291840" y="1463040"/>
-            <a:ext cx="2604960" cy="1141920"/>
+            <a:ext cx="2604600" cy="1141560"/>
           </a:xfrm>
           <a:prstGeom prst="rect">
             <a:avLst/>
@@ -12018,7 +12018,7 @@
         <p:spPr>
           <a:xfrm>
             <a:off x="6126480" y="822960"/>
-            <a:ext cx="2833560" cy="1919160"/>
+            <a:ext cx="2833200" cy="1918800"/>
           </a:xfrm>
           <a:prstGeom prst="rect">
             <a:avLst/>
@@ -12056,7 +12056,7 @@
         <p:spPr>
           <a:xfrm>
             <a:off x="6126480" y="822960"/>
-            <a:ext cx="2833560" cy="53640"/>
+            <a:ext cx="2833200" cy="53280"/>
           </a:xfrm>
           <a:prstGeom prst="rect">
             <a:avLst/>
@@ -12087,7 +12087,7 @@
         <p:spPr>
           <a:xfrm>
             <a:off x="6236280" y="951120"/>
-            <a:ext cx="410400" cy="410400"/>
+            <a:ext cx="410040" cy="410040"/>
           </a:xfrm>
           <a:prstGeom prst="ellipse">
             <a:avLst/>
@@ -12118,7 +12118,7 @@
         <p:spPr>
           <a:xfrm>
             <a:off x="6236280" y="951120"/>
-            <a:ext cx="410400" cy="410400"/>
+            <a:ext cx="410040" cy="410040"/>
           </a:xfrm>
           <a:prstGeom prst="rect">
             <a:avLst/>
@@ -12173,7 +12173,7 @@
         <p:spPr>
           <a:xfrm>
             <a:off x="6720840" y="987480"/>
-            <a:ext cx="2147760" cy="364680"/>
+            <a:ext cx="2147400" cy="364320"/>
           </a:xfrm>
           <a:prstGeom prst="rect">
             <a:avLst/>
@@ -12228,7 +12228,7 @@
         <p:spPr>
           <a:xfrm>
             <a:off x="6263640" y="1463040"/>
-            <a:ext cx="2604960" cy="1141920"/>
+            <a:ext cx="2604600" cy="1141560"/>
           </a:xfrm>
           <a:prstGeom prst="rect">
             <a:avLst/>
@@ -12283,7 +12283,7 @@
         <p:spPr>
           <a:xfrm>
             <a:off x="182880" y="2926080"/>
-            <a:ext cx="2833560" cy="1919160"/>
+            <a:ext cx="2833200" cy="1918800"/>
           </a:xfrm>
           <a:prstGeom prst="rect">
             <a:avLst/>
@@ -12321,7 +12321,7 @@
         <p:spPr>
           <a:xfrm>
             <a:off x="182880" y="2926080"/>
-            <a:ext cx="2833560" cy="53640"/>
+            <a:ext cx="2833200" cy="53280"/>
           </a:xfrm>
           <a:prstGeom prst="rect">
             <a:avLst/>
@@ -12352,7 +12352,7 @@
         <p:spPr>
           <a:xfrm>
             <a:off x="292680" y="3054240"/>
-            <a:ext cx="410400" cy="410400"/>
+            <a:ext cx="410040" cy="410040"/>
           </a:xfrm>
           <a:prstGeom prst="ellipse">
             <a:avLst/>
@@ -12383,7 +12383,7 @@
         <p:spPr>
           <a:xfrm>
             <a:off x="292680" y="3054240"/>
-            <a:ext cx="410400" cy="410400"/>
+            <a:ext cx="410040" cy="410040"/>
           </a:xfrm>
           <a:prstGeom prst="rect">
             <a:avLst/>
@@ -12438,7 +12438,7 @@
         <p:spPr>
           <a:xfrm>
             <a:off x="777240" y="3090600"/>
-            <a:ext cx="2147760" cy="364680"/>
+            <a:ext cx="2147400" cy="364320"/>
           </a:xfrm>
           <a:prstGeom prst="rect">
             <a:avLst/>
@@ -12493,7 +12493,7 @@
         <p:spPr>
           <a:xfrm>
             <a:off x="320040" y="3566160"/>
-            <a:ext cx="2604960" cy="1141920"/>
+            <a:ext cx="2604600" cy="1141560"/>
           </a:xfrm>
           <a:prstGeom prst="rect">
             <a:avLst/>
@@ -12548,7 +12548,7 @@
         <p:spPr>
           <a:xfrm>
             <a:off x="3154680" y="2926080"/>
-            <a:ext cx="2833560" cy="1919160"/>
+            <a:ext cx="2833200" cy="1918800"/>
           </a:xfrm>
           <a:prstGeom prst="rect">
             <a:avLst/>
@@ -12586,7 +12586,7 @@
         <p:spPr>
           <a:xfrm>
             <a:off x="3154680" y="2926080"/>
-            <a:ext cx="2833560" cy="53640"/>
+            <a:ext cx="2833200" cy="53280"/>
           </a:xfrm>
           <a:prstGeom prst="rect">
             <a:avLst/>
@@ -12617,7 +12617,7 @@
         <p:spPr>
           <a:xfrm>
             <a:off x="3264480" y="3054240"/>
-            <a:ext cx="410400" cy="410400"/>
+            <a:ext cx="410040" cy="410040"/>
           </a:xfrm>
           <a:prstGeom prst="ellipse">
             <a:avLst/>
@@ -12648,7 +12648,7 @@
         <p:spPr>
           <a:xfrm>
             <a:off x="3264480" y="3054240"/>
-            <a:ext cx="410400" cy="410400"/>
+            <a:ext cx="410040" cy="410040"/>
           </a:xfrm>
           <a:prstGeom prst="rect">
             <a:avLst/>
@@ -12703,7 +12703,7 @@
         <p:spPr>
           <a:xfrm>
             <a:off x="3749040" y="3090600"/>
-            <a:ext cx="2147760" cy="364680"/>
+            <a:ext cx="2147400" cy="364320"/>
           </a:xfrm>
           <a:prstGeom prst="rect">
             <a:avLst/>
@@ -12758,7 +12758,7 @@
         <p:spPr>
           <a:xfrm>
             <a:off x="3291840" y="3566160"/>
-            <a:ext cx="2604960" cy="1141920"/>
+            <a:ext cx="2604600" cy="1141560"/>
           </a:xfrm>
           <a:prstGeom prst="rect">
             <a:avLst/>
@@ -12813,7 +12813,7 @@
         <p:spPr>
           <a:xfrm>
             <a:off x="182880" y="4663440"/>
-            <a:ext cx="8777160" cy="383040"/>
+            <a:ext cx="8776800" cy="382680"/>
           </a:xfrm>
           <a:prstGeom prst="rect">
             <a:avLst/>
@@ -12844,7 +12844,7 @@
         <p:spPr>
           <a:xfrm>
             <a:off x="182880" y="4663440"/>
-            <a:ext cx="8777160" cy="383040"/>
+            <a:ext cx="8776800" cy="382680"/>
           </a:xfrm>
           <a:prstGeom prst="rect">
             <a:avLst/>
@@ -12936,7 +12936,7 @@
         <p:spPr>
           <a:xfrm>
             <a:off x="0" y="0"/>
-            <a:ext cx="9142920" cy="5142600"/>
+            <a:ext cx="9142560" cy="5142240"/>
           </a:xfrm>
           <a:prstGeom prst="rect">
             <a:avLst/>
@@ -12967,7 +12967,7 @@
         <p:spPr>
           <a:xfrm>
             <a:off x="0" y="0"/>
-            <a:ext cx="9142920" cy="5142600"/>
+            <a:ext cx="9142560" cy="5142240"/>
           </a:xfrm>
           <a:prstGeom prst="rect">
             <a:avLst/>
@@ -13000,7 +13000,7 @@
         <p:spPr>
           <a:xfrm>
             <a:off x="274320" y="457200"/>
-            <a:ext cx="2284920" cy="2742120"/>
+            <a:ext cx="2284560" cy="2741760"/>
           </a:xfrm>
           <a:prstGeom prst="rect">
             <a:avLst/>
@@ -13057,7 +13057,7 @@
         <p:spPr>
           <a:xfrm>
             <a:off x="1005840" y="1645920"/>
-            <a:ext cx="7131240" cy="53640"/>
+            <a:ext cx="7130880" cy="53280"/>
           </a:xfrm>
           <a:prstGeom prst="rect">
             <a:avLst/>
@@ -13088,7 +13088,7 @@
         <p:spPr>
           <a:xfrm>
             <a:off x="1005840" y="1783080"/>
-            <a:ext cx="7771320" cy="1370520"/>
+            <a:ext cx="7770960" cy="1370160"/>
           </a:xfrm>
           <a:prstGeom prst="rect">
             <a:avLst/>
@@ -13143,7 +13143,7 @@
         <p:spPr>
           <a:xfrm>
             <a:off x="1005840" y="3200400"/>
-            <a:ext cx="7771320" cy="821880"/>
+            <a:ext cx="7770960" cy="821520"/>
           </a:xfrm>
           <a:prstGeom prst="rect">
             <a:avLst/>
@@ -13235,7 +13235,7 @@
         <p:spPr>
           <a:xfrm>
             <a:off x="0" y="0"/>
-            <a:ext cx="63000" cy="5142600"/>
+            <a:ext cx="62640" cy="5142240"/>
           </a:xfrm>
           <a:prstGeom prst="rect">
             <a:avLst/>
@@ -13266,7 +13266,7 @@
         <p:spPr>
           <a:xfrm>
             <a:off x="0" y="0"/>
-            <a:ext cx="9142920" cy="712080"/>
+            <a:ext cx="9142560" cy="711720"/>
           </a:xfrm>
           <a:prstGeom prst="rect">
             <a:avLst/>
@@ -13297,7 +13297,7 @@
         <p:spPr>
           <a:xfrm>
             <a:off x="182880" y="0"/>
-            <a:ext cx="7131240" cy="712080"/>
+            <a:ext cx="7130880" cy="711720"/>
           </a:xfrm>
           <a:prstGeom prst="rect">
             <a:avLst/>
@@ -13352,7 +13352,7 @@
         <p:spPr>
           <a:xfrm>
             <a:off x="7589520" y="109800"/>
-            <a:ext cx="1370520" cy="474480"/>
+            <a:ext cx="1370160" cy="474120"/>
           </a:xfrm>
           <a:prstGeom prst="rect">
             <a:avLst/>
@@ -13390,7 +13390,7 @@
         <p:spPr>
           <a:xfrm>
             <a:off x="7589520" y="109800"/>
-            <a:ext cx="1370520" cy="474480"/>
+            <a:ext cx="1370160" cy="474120"/>
           </a:xfrm>
           <a:prstGeom prst="rect">
             <a:avLst/>
@@ -13445,7 +13445,7 @@
         <p:spPr>
           <a:xfrm>
             <a:off x="182880" y="804600"/>
-            <a:ext cx="4113720" cy="1919160"/>
+            <a:ext cx="4113360" cy="1918800"/>
           </a:xfrm>
           <a:prstGeom prst="rect">
             <a:avLst/>
@@ -13483,7 +13483,7 @@
         <p:spPr>
           <a:xfrm>
             <a:off x="182880" y="804600"/>
-            <a:ext cx="4113720" cy="53640"/>
+            <a:ext cx="4113360" cy="53280"/>
           </a:xfrm>
           <a:prstGeom prst="rect">
             <a:avLst/>
@@ -13514,7 +13514,7 @@
         <p:spPr>
           <a:xfrm>
             <a:off x="320040" y="896040"/>
-            <a:ext cx="3747960" cy="273240"/>
+            <a:ext cx="3747600" cy="272880"/>
           </a:xfrm>
           <a:prstGeom prst="rect">
             <a:avLst/>
@@ -13545,7 +13545,7 @@
               </a:tabLst>
             </a:pPr>
             <a:r>
-              <a:rPr b="1" lang="en-US" sz="1000" spc="194" strike="noStrike">
+              <a:rPr b="1" lang="en-US" sz="1000" spc="191" strike="noStrike">
                 <a:solidFill>
                   <a:srgbClr val="f87171"/>
                 </a:solidFill>
@@ -13555,7 +13555,7 @@
               <a:t>    </a:t>
             </a:r>
             <a:r>
-              <a:rPr b="1" lang="en-US" sz="1000" spc="194" strike="noStrike">
+              <a:rPr b="1" lang="en-US" sz="1000" spc="191" strike="noStrike">
                 <a:solidFill>
                   <a:srgbClr val="f87171"/>
                 </a:solidFill>
@@ -13579,7 +13579,7 @@
         <p:spPr>
           <a:xfrm>
             <a:off x="320040" y="1207080"/>
-            <a:ext cx="3747960" cy="318960"/>
+            <a:ext cx="3747600" cy="318600"/>
           </a:xfrm>
           <a:prstGeom prst="rect">
             <a:avLst/>
@@ -13634,7 +13634,7 @@
         <p:spPr>
           <a:xfrm>
             <a:off x="320040" y="1554480"/>
-            <a:ext cx="3747960" cy="501840"/>
+            <a:ext cx="3747600" cy="501480"/>
           </a:xfrm>
           <a:prstGeom prst="rect">
             <a:avLst/>
@@ -13689,7 +13689,7 @@
         <p:spPr>
           <a:xfrm>
             <a:off x="228600" y="822960"/>
-            <a:ext cx="273240" cy="273240"/>
+            <a:ext cx="272880" cy="272880"/>
           </a:xfrm>
           <a:prstGeom prst="ellipse">
             <a:avLst/>
@@ -13720,7 +13720,7 @@
         <p:spPr>
           <a:xfrm>
             <a:off x="228600" y="822960"/>
-            <a:ext cx="273240" cy="273240"/>
+            <a:ext cx="272880" cy="272880"/>
           </a:xfrm>
           <a:prstGeom prst="rect">
             <a:avLst/>
@@ -13775,7 +13775,7 @@
         <p:spPr>
           <a:xfrm>
             <a:off x="4572000" y="804600"/>
-            <a:ext cx="4388040" cy="1919160"/>
+            <a:ext cx="4387680" cy="1918800"/>
           </a:xfrm>
           <a:prstGeom prst="rect">
             <a:avLst/>
@@ -13813,7 +13813,7 @@
         <p:spPr>
           <a:xfrm>
             <a:off x="4572000" y="804600"/>
-            <a:ext cx="4388040" cy="53640"/>
+            <a:ext cx="4387680" cy="53280"/>
           </a:xfrm>
           <a:prstGeom prst="rect">
             <a:avLst/>
@@ -13844,7 +13844,7 @@
         <p:spPr>
           <a:xfrm>
             <a:off x="4709160" y="896040"/>
-            <a:ext cx="4022280" cy="273240"/>
+            <a:ext cx="4021920" cy="272880"/>
           </a:xfrm>
           <a:prstGeom prst="rect">
             <a:avLst/>
@@ -13875,7 +13875,7 @@
               </a:tabLst>
             </a:pPr>
             <a:r>
-              <a:rPr b="1" lang="en-US" sz="1000" spc="194" strike="noStrike">
+              <a:rPr b="1" lang="en-US" sz="1000" spc="191" strike="noStrike">
                 <a:solidFill>
                   <a:srgbClr val="34d399"/>
                 </a:solidFill>
@@ -13899,7 +13899,7 @@
         <p:spPr>
           <a:xfrm>
             <a:off x="4709160" y="1207080"/>
-            <a:ext cx="4113720" cy="547560"/>
+            <a:ext cx="4113360" cy="547200"/>
           </a:xfrm>
           <a:prstGeom prst="rect">
             <a:avLst/>
@@ -13978,7 +13978,7 @@
         <p:spPr>
           <a:xfrm>
             <a:off x="4709160" y="1783080"/>
-            <a:ext cx="4113720" cy="364680"/>
+            <a:ext cx="4113360" cy="364320"/>
           </a:xfrm>
           <a:prstGeom prst="rect">
             <a:avLst/>
@@ -14033,7 +14033,7 @@
         <p:spPr>
           <a:xfrm>
             <a:off x="182880" y="2834640"/>
-            <a:ext cx="8777160" cy="2010600"/>
+            <a:ext cx="8776800" cy="2010240"/>
           </a:xfrm>
           <a:prstGeom prst="rect">
             <a:avLst/>
@@ -14071,7 +14071,7 @@
         <p:spPr>
           <a:xfrm>
             <a:off x="365760" y="2926080"/>
-            <a:ext cx="1827720" cy="273240"/>
+            <a:ext cx="1827360" cy="272880"/>
           </a:xfrm>
           <a:prstGeom prst="rect">
             <a:avLst/>
@@ -14102,7 +14102,7 @@
               </a:tabLst>
             </a:pPr>
             <a:r>
-              <a:rPr b="1" lang="en-US" sz="1000" spc="194" strike="noStrike">
+              <a:rPr b="1" lang="en-US" sz="1000" spc="191" strike="noStrike">
                 <a:solidFill>
                   <a:srgbClr val="38bdf8"/>
                 </a:solidFill>
@@ -14126,7 +14126,7 @@
         <p:spPr>
           <a:xfrm>
             <a:off x="457200" y="3273480"/>
-            <a:ext cx="1644840" cy="776160"/>
+            <a:ext cx="1644480" cy="775800"/>
           </a:xfrm>
           <a:prstGeom prst="rect">
             <a:avLst/>
@@ -14152,11 +14152,21 @@
             <a:noAutofit/>
           </a:bodyPr>
           <a:p>
+            <a:pPr>
+              <a:lnSpc>
+                <a:spcPct val="100000"/>
+              </a:lnSpc>
+              <a:buNone/>
+            </a:pPr>
             <a:r>
               <a:rPr b="0" lang="en-IN" sz="1800" spc="-1" strike="noStrike">
+                <a:solidFill>
+                  <a:srgbClr val="000000"/>
+                </a:solidFill>
                 <a:latin typeface="Arial"/>
-              </a:rPr>
-              <a:t>emp3/emp4</a:t>
+                <a:ea typeface="DejaVu Sans"/>
+              </a:rPr>
+              <a:t>x</a:t>
             </a:r>
             <a:endParaRPr b="0" lang="en-IN" sz="1800" spc="-1" strike="noStrike">
               <a:latin typeface="Arial"/>
@@ -14173,7 +14183,7 @@
         <p:spPr>
           <a:xfrm>
             <a:off x="457200" y="3620880"/>
-            <a:ext cx="1644840" cy="410400"/>
+            <a:ext cx="1644480" cy="410040"/>
           </a:xfrm>
           <a:prstGeom prst="rect">
             <a:avLst/>
@@ -14256,7 +14266,7 @@
         <p:spPr>
           <a:xfrm>
             <a:off x="3566160" y="3401640"/>
-            <a:ext cx="364680" cy="456120"/>
+            <a:ext cx="364320" cy="455760"/>
           </a:xfrm>
           <a:prstGeom prst="rect">
             <a:avLst/>
@@ -14311,7 +14321,7 @@
         <p:spPr>
           <a:xfrm>
             <a:off x="3931920" y="3200400"/>
-            <a:ext cx="3199320" cy="1279080"/>
+            <a:ext cx="3198960" cy="1278720"/>
           </a:xfrm>
           <a:prstGeom prst="rect">
             <a:avLst/>
@@ -14342,7 +14352,7 @@
         <p:spPr>
           <a:xfrm>
             <a:off x="4069080" y="3246120"/>
-            <a:ext cx="2925000" cy="318960"/>
+            <a:ext cx="2924640" cy="318600"/>
           </a:xfrm>
           <a:prstGeom prst="rect">
             <a:avLst/>
@@ -14397,7 +14407,7 @@
         <p:spPr>
           <a:xfrm>
             <a:off x="4069080" y="3566160"/>
-            <a:ext cx="2925000" cy="730440"/>
+            <a:ext cx="2924640" cy="730080"/>
           </a:xfrm>
           <a:prstGeom prst="rect">
             <a:avLst/>
@@ -14476,7 +14486,7 @@
         <p:spPr>
           <a:xfrm>
             <a:off x="7315200" y="3108960"/>
-            <a:ext cx="1553400" cy="1461960"/>
+            <a:ext cx="1553040" cy="1461600"/>
           </a:xfrm>
           <a:prstGeom prst="rect">
             <a:avLst/>
@@ -14507,7 +14517,7 @@
         <p:spPr>
           <a:xfrm>
             <a:off x="7360920" y="3154680"/>
-            <a:ext cx="1461960" cy="273240"/>
+            <a:ext cx="1461600" cy="272880"/>
           </a:xfrm>
           <a:prstGeom prst="rect">
             <a:avLst/>
@@ -14538,7 +14548,7 @@
               </a:tabLst>
             </a:pPr>
             <a:r>
-              <a:rPr b="1" lang="en-US" sz="900" spc="194" strike="noStrike">
+              <a:rPr b="1" lang="en-US" sz="900" spc="191" strike="noStrike">
                 <a:solidFill>
                   <a:srgbClr val="f59e0b"/>
                 </a:solidFill>
@@ -14562,7 +14572,7 @@
         <p:spPr>
           <a:xfrm>
             <a:off x="7360920" y="3447360"/>
-            <a:ext cx="1461960" cy="776160"/>
+            <a:ext cx="1461600" cy="775800"/>
           </a:xfrm>
           <a:prstGeom prst="rect">
             <a:avLst/>
@@ -14712,7 +14722,7 @@
         <p:spPr>
           <a:xfrm>
             <a:off x="0" y="0"/>
-            <a:ext cx="63000" cy="5142600"/>
+            <a:ext cx="62640" cy="5142240"/>
           </a:xfrm>
           <a:prstGeom prst="rect">
             <a:avLst/>
@@ -14743,7 +14753,7 @@
         <p:spPr>
           <a:xfrm>
             <a:off x="0" y="0"/>
-            <a:ext cx="9142920" cy="712080"/>
+            <a:ext cx="9142560" cy="711720"/>
           </a:xfrm>
           <a:prstGeom prst="rect">
             <a:avLst/>
@@ -14774,7 +14784,7 @@
         <p:spPr>
           <a:xfrm>
             <a:off x="182880" y="0"/>
-            <a:ext cx="7131240" cy="712080"/>
+            <a:ext cx="7130880" cy="711720"/>
           </a:xfrm>
           <a:prstGeom prst="rect">
             <a:avLst/>
@@ -14829,7 +14839,7 @@
         <p:spPr>
           <a:xfrm>
             <a:off x="7589520" y="109800"/>
-            <a:ext cx="1370520" cy="474480"/>
+            <a:ext cx="1370160" cy="474120"/>
           </a:xfrm>
           <a:prstGeom prst="rect">
             <a:avLst/>
@@ -14867,7 +14877,7 @@
         <p:spPr>
           <a:xfrm>
             <a:off x="7589520" y="109800"/>
-            <a:ext cx="1370520" cy="474480"/>
+            <a:ext cx="1370160" cy="474120"/>
           </a:xfrm>
           <a:prstGeom prst="rect">
             <a:avLst/>
@@ -14922,7 +14932,7 @@
         <p:spPr>
           <a:xfrm>
             <a:off x="182880" y="804600"/>
-            <a:ext cx="4250880" cy="1964880"/>
+            <a:ext cx="4250520" cy="1964520"/>
           </a:xfrm>
           <a:prstGeom prst="rect">
             <a:avLst/>
@@ -14960,7 +14970,7 @@
         <p:spPr>
           <a:xfrm>
             <a:off x="182880" y="804600"/>
-            <a:ext cx="4250880" cy="53640"/>
+            <a:ext cx="4250520" cy="53280"/>
           </a:xfrm>
           <a:prstGeom prst="rect">
             <a:avLst/>
@@ -14991,7 +15001,7 @@
         <p:spPr>
           <a:xfrm>
             <a:off x="347400" y="941760"/>
-            <a:ext cx="383040" cy="383040"/>
+            <a:ext cx="382680" cy="382680"/>
           </a:xfrm>
           <a:prstGeom prst="ellipse">
             <a:avLst/>
@@ -15022,7 +15032,7 @@
         <p:spPr>
           <a:xfrm>
             <a:off x="347400" y="941760"/>
-            <a:ext cx="383040" cy="383040"/>
+            <a:ext cx="382680" cy="382680"/>
           </a:xfrm>
           <a:prstGeom prst="rect">
             <a:avLst/>
@@ -15077,7 +15087,7 @@
         <p:spPr>
           <a:xfrm>
             <a:off x="822960" y="969120"/>
-            <a:ext cx="3473640" cy="364680"/>
+            <a:ext cx="3473280" cy="364320"/>
           </a:xfrm>
           <a:prstGeom prst="rect">
             <a:avLst/>
@@ -15132,7 +15142,7 @@
         <p:spPr>
           <a:xfrm>
             <a:off x="365760" y="1398960"/>
-            <a:ext cx="3930840" cy="593280"/>
+            <a:ext cx="3930480" cy="592920"/>
           </a:xfrm>
           <a:prstGeom prst="rect">
             <a:avLst/>
@@ -15187,7 +15197,7 @@
         <p:spPr>
           <a:xfrm>
             <a:off x="365760" y="2039040"/>
-            <a:ext cx="3930840" cy="565920"/>
+            <a:ext cx="3930480" cy="565560"/>
           </a:xfrm>
           <a:prstGeom prst="rect">
             <a:avLst/>
@@ -15218,7 +15228,7 @@
         <p:spPr>
           <a:xfrm>
             <a:off x="457200" y="2066400"/>
-            <a:ext cx="3747960" cy="510840"/>
+            <a:ext cx="3747600" cy="510480"/>
           </a:xfrm>
           <a:prstGeom prst="rect">
             <a:avLst/>
@@ -15273,7 +15283,7 @@
         <p:spPr>
           <a:xfrm>
             <a:off x="4617720" y="804600"/>
-            <a:ext cx="4250880" cy="1964880"/>
+            <a:ext cx="4250520" cy="1964520"/>
           </a:xfrm>
           <a:prstGeom prst="rect">
             <a:avLst/>
@@ -15311,7 +15321,7 @@
         <p:spPr>
           <a:xfrm>
             <a:off x="4617720" y="804600"/>
-            <a:ext cx="4250880" cy="53640"/>
+            <a:ext cx="4250520" cy="53280"/>
           </a:xfrm>
           <a:prstGeom prst="rect">
             <a:avLst/>
@@ -15342,7 +15352,7 @@
         <p:spPr>
           <a:xfrm>
             <a:off x="4782240" y="941760"/>
-            <a:ext cx="383040" cy="383040"/>
+            <a:ext cx="382680" cy="382680"/>
           </a:xfrm>
           <a:prstGeom prst="ellipse">
             <a:avLst/>
@@ -15373,7 +15383,7 @@
         <p:spPr>
           <a:xfrm>
             <a:off x="4782240" y="941760"/>
-            <a:ext cx="383040" cy="383040"/>
+            <a:ext cx="382680" cy="382680"/>
           </a:xfrm>
           <a:prstGeom prst="rect">
             <a:avLst/>
@@ -15428,7 +15438,7 @@
         <p:spPr>
           <a:xfrm>
             <a:off x="5257800" y="969120"/>
-            <a:ext cx="3473640" cy="364680"/>
+            <a:ext cx="3473280" cy="364320"/>
           </a:xfrm>
           <a:prstGeom prst="rect">
             <a:avLst/>
@@ -15483,7 +15493,7 @@
         <p:spPr>
           <a:xfrm>
             <a:off x="4800600" y="1398960"/>
-            <a:ext cx="3930840" cy="593280"/>
+            <a:ext cx="3930480" cy="592920"/>
           </a:xfrm>
           <a:prstGeom prst="rect">
             <a:avLst/>
@@ -15538,7 +15548,7 @@
         <p:spPr>
           <a:xfrm>
             <a:off x="4800600" y="2039040"/>
-            <a:ext cx="3930840" cy="565920"/>
+            <a:ext cx="3930480" cy="565560"/>
           </a:xfrm>
           <a:prstGeom prst="rect">
             <a:avLst/>
@@ -15569,7 +15579,7 @@
         <p:spPr>
           <a:xfrm>
             <a:off x="4892040" y="2066400"/>
-            <a:ext cx="3747960" cy="510840"/>
+            <a:ext cx="3747600" cy="510480"/>
           </a:xfrm>
           <a:prstGeom prst="rect">
             <a:avLst/>
@@ -15648,7 +15658,7 @@
         <p:spPr>
           <a:xfrm>
             <a:off x="182880" y="2953440"/>
-            <a:ext cx="4250880" cy="1964880"/>
+            <a:ext cx="4250520" cy="1964520"/>
           </a:xfrm>
           <a:prstGeom prst="rect">
             <a:avLst/>
@@ -15686,7 +15696,7 @@
         <p:spPr>
           <a:xfrm>
             <a:off x="182880" y="2953440"/>
-            <a:ext cx="4250880" cy="53640"/>
+            <a:ext cx="4250520" cy="53280"/>
           </a:xfrm>
           <a:prstGeom prst="rect">
             <a:avLst/>
@@ -15717,7 +15727,7 @@
         <p:spPr>
           <a:xfrm>
             <a:off x="347400" y="3090600"/>
-            <a:ext cx="383040" cy="383040"/>
+            <a:ext cx="382680" cy="382680"/>
           </a:xfrm>
           <a:prstGeom prst="ellipse">
             <a:avLst/>
@@ -15748,7 +15758,7 @@
         <p:spPr>
           <a:xfrm>
             <a:off x="347400" y="3090600"/>
-            <a:ext cx="383040" cy="383040"/>
+            <a:ext cx="382680" cy="382680"/>
           </a:xfrm>
           <a:prstGeom prst="rect">
             <a:avLst/>
@@ -15803,7 +15813,7 @@
         <p:spPr>
           <a:xfrm>
             <a:off x="822960" y="3117960"/>
-            <a:ext cx="3473640" cy="364680"/>
+            <a:ext cx="3473280" cy="364320"/>
           </a:xfrm>
           <a:prstGeom prst="rect">
             <a:avLst/>
@@ -15858,7 +15868,7 @@
         <p:spPr>
           <a:xfrm>
             <a:off x="365760" y="3547800"/>
-            <a:ext cx="3930840" cy="593280"/>
+            <a:ext cx="3930480" cy="592920"/>
           </a:xfrm>
           <a:prstGeom prst="rect">
             <a:avLst/>
@@ -15913,7 +15923,7 @@
         <p:spPr>
           <a:xfrm>
             <a:off x="365760" y="4187880"/>
-            <a:ext cx="3930840" cy="565920"/>
+            <a:ext cx="3930480" cy="565560"/>
           </a:xfrm>
           <a:prstGeom prst="rect">
             <a:avLst/>
@@ -15944,7 +15954,7 @@
         <p:spPr>
           <a:xfrm>
             <a:off x="457200" y="4215240"/>
-            <a:ext cx="3747960" cy="510840"/>
+            <a:ext cx="3747600" cy="510480"/>
           </a:xfrm>
           <a:prstGeom prst="rect">
             <a:avLst/>
@@ -16023,7 +16033,7 @@
         <p:spPr>
           <a:xfrm>
             <a:off x="4617720" y="2953440"/>
-            <a:ext cx="4250880" cy="1964880"/>
+            <a:ext cx="4250520" cy="1964520"/>
           </a:xfrm>
           <a:prstGeom prst="rect">
             <a:avLst/>
@@ -16061,7 +16071,7 @@
         <p:spPr>
           <a:xfrm>
             <a:off x="4617720" y="2953440"/>
-            <a:ext cx="4250880" cy="53640"/>
+            <a:ext cx="4250520" cy="53280"/>
           </a:xfrm>
           <a:prstGeom prst="rect">
             <a:avLst/>
@@ -16092,7 +16102,7 @@
         <p:spPr>
           <a:xfrm>
             <a:off x="4782240" y="3090600"/>
-            <a:ext cx="383040" cy="383040"/>
+            <a:ext cx="382680" cy="382680"/>
           </a:xfrm>
           <a:prstGeom prst="ellipse">
             <a:avLst/>
@@ -16123,7 +16133,7 @@
         <p:spPr>
           <a:xfrm>
             <a:off x="4782240" y="3090600"/>
-            <a:ext cx="383040" cy="383040"/>
+            <a:ext cx="382680" cy="382680"/>
           </a:xfrm>
           <a:prstGeom prst="rect">
             <a:avLst/>
@@ -16178,7 +16188,7 @@
         <p:spPr>
           <a:xfrm>
             <a:off x="5257800" y="3117960"/>
-            <a:ext cx="3473640" cy="364680"/>
+            <a:ext cx="3473280" cy="364320"/>
           </a:xfrm>
           <a:prstGeom prst="rect">
             <a:avLst/>
@@ -16233,7 +16243,7 @@
         <p:spPr>
           <a:xfrm>
             <a:off x="4800600" y="3547800"/>
-            <a:ext cx="3930840" cy="593280"/>
+            <a:ext cx="3930480" cy="592920"/>
           </a:xfrm>
           <a:prstGeom prst="rect">
             <a:avLst/>
@@ -16288,7 +16298,7 @@
         <p:spPr>
           <a:xfrm>
             <a:off x="4800600" y="4187880"/>
-            <a:ext cx="3930840" cy="565920"/>
+            <a:ext cx="3930480" cy="565560"/>
           </a:xfrm>
           <a:prstGeom prst="rect">
             <a:avLst/>
@@ -16319,7 +16329,7 @@
         <p:spPr>
           <a:xfrm>
             <a:off x="4892040" y="4215240"/>
-            <a:ext cx="3747960" cy="510840"/>
+            <a:ext cx="3747600" cy="510480"/>
           </a:xfrm>
           <a:prstGeom prst="rect">
             <a:avLst/>
@@ -16435,7 +16445,7 @@
         <p:spPr>
           <a:xfrm>
             <a:off x="0" y="0"/>
-            <a:ext cx="9142920" cy="5142600"/>
+            <a:ext cx="9142560" cy="5142240"/>
           </a:xfrm>
           <a:prstGeom prst="rect">
             <a:avLst/>
@@ -16466,7 +16476,7 @@
         <p:spPr>
           <a:xfrm>
             <a:off x="0" y="0"/>
-            <a:ext cx="9142920" cy="5142600"/>
+            <a:ext cx="9142560" cy="5142240"/>
           </a:xfrm>
           <a:prstGeom prst="rect">
             <a:avLst/>
@@ -16499,7 +16509,7 @@
         <p:spPr>
           <a:xfrm>
             <a:off x="274320" y="457200"/>
-            <a:ext cx="2284920" cy="2742120"/>
+            <a:ext cx="2284560" cy="2741760"/>
           </a:xfrm>
           <a:prstGeom prst="rect">
             <a:avLst/>
@@ -16556,7 +16566,7 @@
         <p:spPr>
           <a:xfrm>
             <a:off x="1005840" y="1645920"/>
-            <a:ext cx="7131240" cy="53640"/>
+            <a:ext cx="7130880" cy="53280"/>
           </a:xfrm>
           <a:prstGeom prst="rect">
             <a:avLst/>
@@ -16587,7 +16597,7 @@
         <p:spPr>
           <a:xfrm>
             <a:off x="1005840" y="1783080"/>
-            <a:ext cx="7771320" cy="1370520"/>
+            <a:ext cx="7770960" cy="1370160"/>
           </a:xfrm>
           <a:prstGeom prst="rect">
             <a:avLst/>
@@ -16642,7 +16652,7 @@
         <p:spPr>
           <a:xfrm>
             <a:off x="1005840" y="3200400"/>
-            <a:ext cx="7771320" cy="821880"/>
+            <a:ext cx="7770960" cy="821520"/>
           </a:xfrm>
           <a:prstGeom prst="rect">
             <a:avLst/>
@@ -16734,7 +16744,7 @@
         <p:spPr>
           <a:xfrm>
             <a:off x="0" y="0"/>
-            <a:ext cx="63000" cy="5142600"/>
+            <a:ext cx="62640" cy="5142240"/>
           </a:xfrm>
           <a:prstGeom prst="rect">
             <a:avLst/>
@@ -16765,7 +16775,7 @@
         <p:spPr>
           <a:xfrm>
             <a:off x="0" y="0"/>
-            <a:ext cx="9142920" cy="712080"/>
+            <a:ext cx="9142560" cy="711720"/>
           </a:xfrm>
           <a:prstGeom prst="rect">
             <a:avLst/>
@@ -16796,7 +16806,7 @@
         <p:spPr>
           <a:xfrm>
             <a:off x="182880" y="0"/>
-            <a:ext cx="7131240" cy="712080"/>
+            <a:ext cx="7130880" cy="711720"/>
           </a:xfrm>
           <a:prstGeom prst="rect">
             <a:avLst/>
@@ -16851,7 +16861,7 @@
         <p:spPr>
           <a:xfrm>
             <a:off x="7589520" y="109800"/>
-            <a:ext cx="1370520" cy="474480"/>
+            <a:ext cx="1370160" cy="474120"/>
           </a:xfrm>
           <a:prstGeom prst="rect">
             <a:avLst/>
@@ -16889,7 +16899,7 @@
         <p:spPr>
           <a:xfrm>
             <a:off x="7589520" y="109800"/>
-            <a:ext cx="1370520" cy="474480"/>
+            <a:ext cx="1370160" cy="474120"/>
           </a:xfrm>
           <a:prstGeom prst="rect">
             <a:avLst/>
@@ -16944,7 +16954,7 @@
         <p:spPr>
           <a:xfrm>
             <a:off x="182880" y="804600"/>
-            <a:ext cx="5211000" cy="4022280"/>
+            <a:ext cx="5210640" cy="4021920"/>
           </a:xfrm>
           <a:prstGeom prst="rect">
             <a:avLst/>
@@ -16982,7 +16992,7 @@
         <p:spPr>
           <a:xfrm>
             <a:off x="320040" y="896040"/>
-            <a:ext cx="4936680" cy="346320"/>
+            <a:ext cx="4936320" cy="345960"/>
           </a:xfrm>
           <a:prstGeom prst="rect">
             <a:avLst/>
@@ -17037,7 +17047,7 @@
         <p:spPr>
           <a:xfrm>
             <a:off x="320040" y="1280160"/>
-            <a:ext cx="4899960" cy="3863520"/>
+            <a:ext cx="4899600" cy="3863160"/>
           </a:xfrm>
           <a:prstGeom prst="rect">
             <a:avLst/>
@@ -17075,7 +17085,7 @@
         <p:spPr>
           <a:xfrm>
             <a:off x="429840" y="1334880"/>
-            <a:ext cx="108720" cy="108720"/>
+            <a:ext cx="108360" cy="108360"/>
           </a:xfrm>
           <a:prstGeom prst="ellipse">
             <a:avLst/>
@@ -17106,7 +17116,7 @@
         <p:spPr>
           <a:xfrm>
             <a:off x="612720" y="1334880"/>
-            <a:ext cx="108720" cy="108720"/>
+            <a:ext cx="108360" cy="108360"/>
           </a:xfrm>
           <a:prstGeom prst="ellipse">
             <a:avLst/>
@@ -17137,7 +17147,7 @@
         <p:spPr>
           <a:xfrm>
             <a:off x="795600" y="1334880"/>
-            <a:ext cx="108720" cy="108720"/>
+            <a:ext cx="108360" cy="108360"/>
           </a:xfrm>
           <a:prstGeom prst="ellipse">
             <a:avLst/>
@@ -17168,7 +17178,7 @@
         <p:spPr>
           <a:xfrm>
             <a:off x="320040" y="1280160"/>
-            <a:ext cx="4936680" cy="254880"/>
+            <a:ext cx="4936320" cy="254520"/>
           </a:xfrm>
           <a:prstGeom prst="rect">
             <a:avLst/>
@@ -17199,7 +17209,7 @@
         <p:spPr>
           <a:xfrm>
             <a:off x="429840" y="1572840"/>
-            <a:ext cx="4753800" cy="2998080"/>
+            <a:ext cx="4753440" cy="2997720"/>
           </a:xfrm>
           <a:prstGeom prst="rect">
             <a:avLst/>
@@ -17904,7 +17914,7 @@
         <p:spPr>
           <a:xfrm>
             <a:off x="5577840" y="804600"/>
-            <a:ext cx="3422160" cy="4235400"/>
+            <a:ext cx="3421800" cy="4235040"/>
           </a:xfrm>
           <a:prstGeom prst="rect">
             <a:avLst/>
@@ -17942,7 +17952,7 @@
         <p:spPr>
           <a:xfrm>
             <a:off x="5715000" y="896040"/>
-            <a:ext cx="3107880" cy="364680"/>
+            <a:ext cx="3107520" cy="364320"/>
           </a:xfrm>
           <a:prstGeom prst="rect">
             <a:avLst/>
@@ -17997,7 +18007,7 @@
         <p:spPr>
           <a:xfrm>
             <a:off x="5715000" y="1353240"/>
-            <a:ext cx="3107880" cy="273240"/>
+            <a:ext cx="3107520" cy="272880"/>
           </a:xfrm>
           <a:prstGeom prst="rect">
             <a:avLst/>
@@ -18052,7 +18062,7 @@
         <p:spPr>
           <a:xfrm>
             <a:off x="5715000" y="1627560"/>
-            <a:ext cx="3107880" cy="593280"/>
+            <a:ext cx="3107520" cy="592920"/>
           </a:xfrm>
           <a:prstGeom prst="rect">
             <a:avLst/>
@@ -18107,7 +18117,7 @@
         <p:spPr>
           <a:xfrm>
             <a:off x="5715000" y="2286000"/>
-            <a:ext cx="3107880" cy="273240"/>
+            <a:ext cx="3107520" cy="272880"/>
           </a:xfrm>
           <a:prstGeom prst="rect">
             <a:avLst/>
@@ -18162,7 +18172,7 @@
         <p:spPr>
           <a:xfrm>
             <a:off x="5715000" y="2560320"/>
-            <a:ext cx="3107880" cy="593280"/>
+            <a:ext cx="3107520" cy="592920"/>
           </a:xfrm>
           <a:prstGeom prst="rect">
             <a:avLst/>
@@ -18217,7 +18227,7 @@
         <p:spPr>
           <a:xfrm>
             <a:off x="5715000" y="3218760"/>
-            <a:ext cx="3107880" cy="273240"/>
+            <a:ext cx="3107520" cy="272880"/>
           </a:xfrm>
           <a:prstGeom prst="rect">
             <a:avLst/>
@@ -18272,7 +18282,7 @@
         <p:spPr>
           <a:xfrm>
             <a:off x="5715000" y="3493080"/>
-            <a:ext cx="3107880" cy="593280"/>
+            <a:ext cx="3107520" cy="592920"/>
           </a:xfrm>
           <a:prstGeom prst="rect">
             <a:avLst/>
@@ -18327,7 +18337,7 @@
         <p:spPr>
           <a:xfrm>
             <a:off x="5715000" y="4151520"/>
-            <a:ext cx="3107880" cy="273240"/>
+            <a:ext cx="3107520" cy="272880"/>
           </a:xfrm>
           <a:prstGeom prst="rect">
             <a:avLst/>
@@ -18382,7 +18392,7 @@
         <p:spPr>
           <a:xfrm>
             <a:off x="5715000" y="4425840"/>
-            <a:ext cx="3107880" cy="593280"/>
+            <a:ext cx="3107520" cy="592920"/>
           </a:xfrm>
           <a:prstGeom prst="rect">
             <a:avLst/>
@@ -18474,7 +18484,7 @@
         <p:spPr>
           <a:xfrm>
             <a:off x="0" y="0"/>
-            <a:ext cx="9142920" cy="5142600"/>
+            <a:ext cx="9142560" cy="5142240"/>
           </a:xfrm>
           <a:prstGeom prst="rect">
             <a:avLst/>
@@ -18505,7 +18515,7 @@
         <p:spPr>
           <a:xfrm>
             <a:off x="0" y="0"/>
-            <a:ext cx="9142920" cy="5142600"/>
+            <a:ext cx="9142560" cy="5142240"/>
           </a:xfrm>
           <a:prstGeom prst="rect">
             <a:avLst/>
@@ -18538,7 +18548,7 @@
         <p:spPr>
           <a:xfrm>
             <a:off x="274320" y="457200"/>
-            <a:ext cx="2284920" cy="2742120"/>
+            <a:ext cx="2284560" cy="2741760"/>
           </a:xfrm>
           <a:prstGeom prst="rect">
             <a:avLst/>
@@ -18595,7 +18605,7 @@
         <p:spPr>
           <a:xfrm>
             <a:off x="1005840" y="1645920"/>
-            <a:ext cx="7131240" cy="53640"/>
+            <a:ext cx="7130880" cy="53280"/>
           </a:xfrm>
           <a:prstGeom prst="rect">
             <a:avLst/>
@@ -18626,7 +18636,7 @@
         <p:spPr>
           <a:xfrm>
             <a:off x="1005840" y="1783080"/>
-            <a:ext cx="7771320" cy="1370520"/>
+            <a:ext cx="7770960" cy="1370160"/>
           </a:xfrm>
           <a:prstGeom prst="rect">
             <a:avLst/>
@@ -18681,7 +18691,7 @@
         <p:spPr>
           <a:xfrm>
             <a:off x="1005840" y="3200400"/>
-            <a:ext cx="7771320" cy="821880"/>
+            <a:ext cx="7770960" cy="821520"/>
           </a:xfrm>
           <a:prstGeom prst="rect">
             <a:avLst/>
@@ -18773,7 +18783,7 @@
         <p:spPr>
           <a:xfrm>
             <a:off x="0" y="0"/>
-            <a:ext cx="63000" cy="5142600"/>
+            <a:ext cx="62640" cy="5142240"/>
           </a:xfrm>
           <a:prstGeom prst="rect">
             <a:avLst/>
@@ -18804,7 +18814,7 @@
         <p:spPr>
           <a:xfrm>
             <a:off x="0" y="0"/>
-            <a:ext cx="9142920" cy="712080"/>
+            <a:ext cx="9142560" cy="711720"/>
           </a:xfrm>
           <a:prstGeom prst="rect">
             <a:avLst/>
@@ -18835,7 +18845,7 @@
         <p:spPr>
           <a:xfrm>
             <a:off x="182880" y="0"/>
-            <a:ext cx="7131240" cy="712080"/>
+            <a:ext cx="7130880" cy="711720"/>
           </a:xfrm>
           <a:prstGeom prst="rect">
             <a:avLst/>
@@ -18890,7 +18900,7 @@
         <p:spPr>
           <a:xfrm>
             <a:off x="7589520" y="109800"/>
-            <a:ext cx="1370520" cy="474480"/>
+            <a:ext cx="1370160" cy="474120"/>
           </a:xfrm>
           <a:prstGeom prst="rect">
             <a:avLst/>
@@ -18928,7 +18938,7 @@
         <p:spPr>
           <a:xfrm>
             <a:off x="7589520" y="109800"/>
-            <a:ext cx="1370520" cy="474480"/>
+            <a:ext cx="1370160" cy="474120"/>
           </a:xfrm>
           <a:prstGeom prst="rect">
             <a:avLst/>
@@ -18983,7 +18993,7 @@
         <p:spPr>
           <a:xfrm>
             <a:off x="182880" y="804600"/>
-            <a:ext cx="4250880" cy="2376360"/>
+            <a:ext cx="4250520" cy="2376000"/>
           </a:xfrm>
           <a:prstGeom prst="rect">
             <a:avLst/>
@@ -19021,7 +19031,7 @@
         <p:spPr>
           <a:xfrm>
             <a:off x="182880" y="804600"/>
-            <a:ext cx="4250880" cy="53640"/>
+            <a:ext cx="4250520" cy="53280"/>
           </a:xfrm>
           <a:prstGeom prst="rect">
             <a:avLst/>
@@ -19052,7 +19062,7 @@
         <p:spPr>
           <a:xfrm>
             <a:off x="320040" y="896040"/>
-            <a:ext cx="4022280" cy="364680"/>
+            <a:ext cx="4021920" cy="364320"/>
           </a:xfrm>
           <a:prstGeom prst="rect">
             <a:avLst/>
@@ -19107,7 +19117,7 @@
         <p:spPr>
           <a:xfrm>
             <a:off x="320040" y="1298520"/>
-            <a:ext cx="4022280" cy="1050480"/>
+            <a:ext cx="4021920" cy="1050120"/>
           </a:xfrm>
           <a:prstGeom prst="rect">
             <a:avLst/>
@@ -19238,7 +19248,7 @@
         <p:spPr>
           <a:xfrm>
             <a:off x="320040" y="2395800"/>
-            <a:ext cx="4022280" cy="547560"/>
+            <a:ext cx="4021920" cy="547200"/>
           </a:xfrm>
           <a:prstGeom prst="rect">
             <a:avLst/>
@@ -19303,7 +19313,7 @@
         <p:spPr>
           <a:xfrm>
             <a:off x="4617720" y="804600"/>
-            <a:ext cx="4250880" cy="2376360"/>
+            <a:ext cx="4250520" cy="2376000"/>
           </a:xfrm>
           <a:prstGeom prst="rect">
             <a:avLst/>
@@ -19341,7 +19351,7 @@
         <p:spPr>
           <a:xfrm>
             <a:off x="4617720" y="804600"/>
-            <a:ext cx="4250880" cy="53640"/>
+            <a:ext cx="4250520" cy="53280"/>
           </a:xfrm>
           <a:prstGeom prst="rect">
             <a:avLst/>
@@ -19372,7 +19382,7 @@
         <p:spPr>
           <a:xfrm>
             <a:off x="4754880" y="896040"/>
-            <a:ext cx="4022280" cy="364680"/>
+            <a:ext cx="4021920" cy="364320"/>
           </a:xfrm>
           <a:prstGeom prst="rect">
             <a:avLst/>
@@ -19427,7 +19437,7 @@
         <p:spPr>
           <a:xfrm>
             <a:off x="4754880" y="1298520"/>
-            <a:ext cx="4022280" cy="1050480"/>
+            <a:ext cx="4021920" cy="1050120"/>
           </a:xfrm>
           <a:prstGeom prst="rect">
             <a:avLst/>
@@ -19533,7 +19543,7 @@
         <p:spPr>
           <a:xfrm>
             <a:off x="4754880" y="2395800"/>
-            <a:ext cx="4022280" cy="547560"/>
+            <a:ext cx="4021920" cy="547200"/>
           </a:xfrm>
           <a:prstGeom prst="rect">
             <a:avLst/>
@@ -19598,7 +19608,7 @@
         <p:spPr>
           <a:xfrm>
             <a:off x="2880" y="3273480"/>
-            <a:ext cx="5036400" cy="2125800"/>
+            <a:ext cx="5036040" cy="2125440"/>
           </a:xfrm>
           <a:prstGeom prst="rect">
             <a:avLst/>
@@ -19636,7 +19646,7 @@
         <p:spPr>
           <a:xfrm>
             <a:off x="182880" y="3273480"/>
-            <a:ext cx="5028120" cy="227520"/>
+            <a:ext cx="5027760" cy="227160"/>
           </a:xfrm>
           <a:prstGeom prst="rect">
             <a:avLst/>
@@ -19667,7 +19677,7 @@
         <p:spPr>
           <a:xfrm>
             <a:off x="292680" y="3328560"/>
-            <a:ext cx="99360" cy="99360"/>
+            <a:ext cx="99000" cy="99000"/>
           </a:xfrm>
           <a:prstGeom prst="ellipse">
             <a:avLst/>
@@ -19698,7 +19708,7 @@
         <p:spPr>
           <a:xfrm>
             <a:off x="475560" y="3328560"/>
-            <a:ext cx="99360" cy="99360"/>
+            <a:ext cx="99000" cy="99000"/>
           </a:xfrm>
           <a:prstGeom prst="ellipse">
             <a:avLst/>
@@ -19729,7 +19739,7 @@
         <p:spPr>
           <a:xfrm>
             <a:off x="658440" y="3328560"/>
-            <a:ext cx="99360" cy="99360"/>
+            <a:ext cx="99000" cy="99000"/>
           </a:xfrm>
           <a:prstGeom prst="ellipse">
             <a:avLst/>
@@ -19760,7 +19770,7 @@
         <p:spPr>
           <a:xfrm>
             <a:off x="292680" y="3520440"/>
-            <a:ext cx="4845240" cy="1297440"/>
+            <a:ext cx="4844880" cy="1297080"/>
           </a:xfrm>
           <a:prstGeom prst="rect">
             <a:avLst/>
@@ -20094,7 +20104,7 @@
         <p:spPr>
           <a:xfrm>
             <a:off x="5394960" y="3273480"/>
-            <a:ext cx="3565080" cy="1599120"/>
+            <a:ext cx="3564720" cy="1598760"/>
           </a:xfrm>
           <a:prstGeom prst="rect">
             <a:avLst/>
@@ -20132,7 +20142,7 @@
         <p:spPr>
           <a:xfrm>
             <a:off x="5532120" y="3364920"/>
-            <a:ext cx="3290760" cy="273240"/>
+            <a:ext cx="3290400" cy="272880"/>
           </a:xfrm>
           <a:prstGeom prst="rect">
             <a:avLst/>
@@ -20163,7 +20173,7 @@
               </a:tabLst>
             </a:pPr>
             <a:r>
-              <a:rPr b="1" lang="en-US" sz="1000" spc="194" strike="noStrike">
+              <a:rPr b="1" lang="en-US" sz="1000" spc="191" strike="noStrike">
                 <a:solidFill>
                   <a:srgbClr val="34d399"/>
                 </a:solidFill>
@@ -20187,7 +20197,7 @@
         <p:spPr>
           <a:xfrm>
             <a:off x="5532120" y="3657600"/>
-            <a:ext cx="3290760" cy="1096200"/>
+            <a:ext cx="3290400" cy="1095840"/>
           </a:xfrm>
           <a:prstGeom prst="rect">
             <a:avLst/>
@@ -20279,7 +20289,7 @@
         <p:spPr>
           <a:xfrm>
             <a:off x="0" y="0"/>
-            <a:ext cx="9142920" cy="5142600"/>
+            <a:ext cx="9142560" cy="5142240"/>
           </a:xfrm>
           <a:prstGeom prst="rect">
             <a:avLst/>
@@ -20310,7 +20320,7 @@
         <p:spPr>
           <a:xfrm>
             <a:off x="0" y="0"/>
-            <a:ext cx="9142920" cy="5142600"/>
+            <a:ext cx="9142560" cy="5142240"/>
           </a:xfrm>
           <a:prstGeom prst="rect">
             <a:avLst/>
@@ -20343,7 +20353,7 @@
         <p:spPr>
           <a:xfrm>
             <a:off x="274320" y="457200"/>
-            <a:ext cx="2284920" cy="2742120"/>
+            <a:ext cx="2284560" cy="2741760"/>
           </a:xfrm>
           <a:prstGeom prst="rect">
             <a:avLst/>
@@ -20400,7 +20410,7 @@
         <p:spPr>
           <a:xfrm>
             <a:off x="1005840" y="1645920"/>
-            <a:ext cx="7131240" cy="53640"/>
+            <a:ext cx="7130880" cy="53280"/>
           </a:xfrm>
           <a:prstGeom prst="rect">
             <a:avLst/>
@@ -20431,7 +20441,7 @@
         <p:spPr>
           <a:xfrm>
             <a:off x="1005840" y="1783080"/>
-            <a:ext cx="7771320" cy="1370520"/>
+            <a:ext cx="7770960" cy="1370160"/>
           </a:xfrm>
           <a:prstGeom prst="rect">
             <a:avLst/>
@@ -20486,7 +20496,7 @@
         <p:spPr>
           <a:xfrm>
             <a:off x="1005840" y="3200400"/>
-            <a:ext cx="7771320" cy="821880"/>
+            <a:ext cx="7770960" cy="821520"/>
           </a:xfrm>
           <a:prstGeom prst="rect">
             <a:avLst/>
